--- a/20_Projects/海音_心体の調律/タマラ/20261021_タマラが大きく変わります_プラクティショナー向け.pptx
+++ b/20_Projects/海音_心体の調律/タマラ/20261021_タマラが大きく変わります_プラクティショナー向け.pptx
@@ -1617,7 +1617,7 @@
                   <a:schemeClr val="tx1"/>
                 </a:solidFill>
               </a:rPr>
-              <a:t>アクティベーションとのセットのみ</a:t>
+              <a:t>セットのみになります</a:t>
             </a:r>
             <a:endParaRPr lang="en-US" sz="1600" dirty="0"/>
           </a:p>
@@ -1689,7 +1689,7 @@
         <p:spPr>
           <a:xfrm>
             <a:off x="457200" y="6492240"/>
-            <a:ext cx="2743200" cy="1828800"/>
+            <a:ext cx="2743200" cy="1325880"/>
           </a:xfrm>
           <a:prstGeom prst="rect">
             <a:avLst/>
@@ -1704,8 +1704,8 @@
         </p:nvSpPr>
         <p:spPr>
           <a:xfrm>
-            <a:off x="3520440" y="6492240"/>
-            <a:ext cx="3584448" cy="320040"/>
+            <a:off x="457200" y="7863840"/>
+            <a:ext cx="1371600" cy="228600"/>
           </a:xfrm>
           <a:prstGeom prst="rect">
             <a:avLst/>
@@ -1721,103 +1721,31 @@
               <a:buNone/>
             </a:pPr>
             <a:r>
-              <a:rPr lang="en-US" sz="1500" b="1" dirty="0">
-                <a:solidFill>
-                  <a:schemeClr val="tx2"/>
-                </a:solidFill>
-              </a:rPr>
-              <a:t>ファーストセッションを受けると</a:t>
-            </a:r>
-            <a:endParaRPr lang="en-US" sz="1500" dirty="0"/>
-          </a:p>
-        </p:txBody>
-      </p:sp>
-      <p:sp>
-        <p:nvSpPr>
-          <p:cNvPr id="21" name="Text 17"/>
-          <p:cNvSpPr txBox="1"/>
-          <p:nvPr/>
-        </p:nvSpPr>
-        <p:spPr>
-          <a:xfrm>
-            <a:off x="3520440" y="6858000"/>
-            <a:ext cx="3584448" cy="868680"/>
-          </a:xfrm>
-          <a:prstGeom prst="rect">
-            <a:avLst/>
-          </a:prstGeom>
-          <a:noFill/>
-          <a:ln/>
-        </p:spPr>
-        <p:txBody>
-          <a:bodyPr wrap="square" lIns="0" tIns="0" rIns="0" bIns="0" rtlCol="0" anchor="t"/>
-          <a:lstStyle/>
-          <a:p>
-            <a:pPr indent="0" marL="0">
-              <a:buNone/>
-            </a:pPr>
-            <a:r>
-              <a:rPr lang="en-US" sz="1300" dirty="0">
-                <a:solidFill>
-                  <a:schemeClr val="tx1"/>
-                </a:solidFill>
-              </a:rPr>
-              <a:t>今の世の中は、陰のエネルギーがとても強くなっています。ファーストセッションで邪魔をするエネルギーが消えて、より進みやすくなります。</a:t>
-            </a:r>
-            <a:endParaRPr lang="en-US" sz="1300" dirty="0"/>
-          </a:p>
-        </p:txBody>
-      </p:sp>
-      <p:sp>
-        <p:nvSpPr>
-          <p:cNvPr id="22" name="Text 18"/>
-          <p:cNvSpPr txBox="1"/>
-          <p:nvPr/>
-        </p:nvSpPr>
-        <p:spPr>
-          <a:xfrm>
-            <a:off x="3520440" y="7726680"/>
-            <a:ext cx="1371600" cy="274320"/>
-          </a:xfrm>
-          <a:prstGeom prst="rect">
-            <a:avLst/>
-          </a:prstGeom>
-          <a:noFill/>
-          <a:ln/>
-        </p:spPr>
-        <p:txBody>
-          <a:bodyPr wrap="square" lIns="0" tIns="0" rIns="0" bIns="0" rtlCol="0" anchor="t"/>
-          <a:lstStyle/>
-          <a:p>
-            <a:pPr indent="0" marL="0">
-              <a:buNone/>
-            </a:pPr>
-            <a:r>
-              <a:rPr lang="en-US" sz="1200" b="1" dirty="0">
+              <a:rPr lang="en-US" sz="1100" b="1" dirty="0">
                 <a:solidFill>
                   <a:schemeClr val="accent3"/>
                 </a:solidFill>
               </a:rPr>
               <a:t>受けた方の声</a:t>
             </a:r>
-            <a:endParaRPr lang="en-US" sz="1200" dirty="0"/>
-          </a:p>
-        </p:txBody>
-      </p:sp>
-      <p:sp>
-        <p:nvSpPr>
-          <p:cNvPr id="23" name="voice0"/>
+            <a:endParaRPr lang="en-US" sz="1100" dirty="0"/>
+          </a:p>
+        </p:txBody>
+      </p:sp>
+      <p:sp>
+        <p:nvSpPr>
+          <p:cNvPr id="21" name="voice0"/>
           <p:cNvSpPr/>
           <p:nvPr/>
         </p:nvSpPr>
         <p:spPr>
           <a:xfrm>
-            <a:off x="3520440" y="8001000"/>
-            <a:ext cx="1463040" cy="502920"/>
+            <a:off x="457200" y="8092440"/>
+            <a:ext cx="1344168" cy="457200"/>
           </a:xfrm>
           <a:prstGeom prst="roundRect">
             <a:avLst>
-              <a:gd name="adj" fmla="val 27273"/>
+              <a:gd name="adj" fmla="val 30000"/>
             </a:avLst>
           </a:prstGeom>
           <a:solidFill>
@@ -1833,14 +1761,14 @@
       </p:sp>
       <p:sp>
         <p:nvSpPr>
-          <p:cNvPr id="24" name="Text 20"/>
+          <p:cNvPr id="22" name="Text 18"/>
           <p:cNvSpPr txBox="1"/>
           <p:nvPr/>
         </p:nvSpPr>
         <p:spPr>
           <a:xfrm>
-            <a:off x="3566160" y="8001000"/>
-            <a:ext cx="1371600" cy="502920"/>
+            <a:off x="484632" y="8092440"/>
+            <a:ext cx="1289304" cy="457200"/>
           </a:xfrm>
           <a:prstGeom prst="rect">
             <a:avLst/>
@@ -1856,45 +1784,45 @@
               <a:buNone/>
             </a:pPr>
             <a:r>
-              <a:rPr lang="en-US" sz="1200" b="1" dirty="0">
+              <a:rPr lang="en-US" sz="1100" b="1" dirty="0">
                 <a:solidFill>
                   <a:schemeClr val="tx2"/>
                 </a:solidFill>
               </a:rPr>
               <a:t>「エネルギーが</a:t>
             </a:r>
-            <a:endParaRPr lang="en-US" sz="1200" dirty="0"/>
+            <a:endParaRPr lang="en-US" sz="1100" dirty="0"/>
           </a:p>
           <a:p>
             <a:pPr algn="ctr" indent="0" marL="0">
               <a:buNone/>
             </a:pPr>
             <a:r>
-              <a:rPr lang="en-US" sz="1200" b="1" dirty="0">
+              <a:rPr lang="en-US" sz="1100" b="1" dirty="0">
                 <a:solidFill>
                   <a:schemeClr val="tx2"/>
                 </a:solidFill>
               </a:rPr>
               <a:t>軽くなった」</a:t>
             </a:r>
-            <a:endParaRPr lang="en-US" sz="1200" dirty="0"/>
-          </a:p>
-        </p:txBody>
-      </p:sp>
-      <p:sp>
-        <p:nvSpPr>
-          <p:cNvPr id="25" name="voice1"/>
+            <a:endParaRPr lang="en-US" sz="1100" dirty="0"/>
+          </a:p>
+        </p:txBody>
+      </p:sp>
+      <p:sp>
+        <p:nvSpPr>
+          <p:cNvPr id="23" name="voice1"/>
           <p:cNvSpPr/>
           <p:nvPr/>
         </p:nvSpPr>
         <p:spPr>
           <a:xfrm>
-            <a:off x="5074920" y="8001000"/>
-            <a:ext cx="1463040" cy="502920"/>
+            <a:off x="1856232" y="8092440"/>
+            <a:ext cx="1344168" cy="457200"/>
           </a:xfrm>
           <a:prstGeom prst="roundRect">
             <a:avLst>
-              <a:gd name="adj" fmla="val 27273"/>
+              <a:gd name="adj" fmla="val 30000"/>
             </a:avLst>
           </a:prstGeom>
           <a:solidFill>
@@ -1910,14 +1838,100 @@
       </p:sp>
       <p:sp>
         <p:nvSpPr>
+          <p:cNvPr id="24" name="Text 20"/>
+          <p:cNvSpPr txBox="1"/>
+          <p:nvPr/>
+        </p:nvSpPr>
+        <p:spPr>
+          <a:xfrm>
+            <a:off x="1883664" y="8092440"/>
+            <a:ext cx="1289304" cy="457200"/>
+          </a:xfrm>
+          <a:prstGeom prst="rect">
+            <a:avLst/>
+          </a:prstGeom>
+          <a:noFill/>
+          <a:ln/>
+        </p:spPr>
+        <p:txBody>
+          <a:bodyPr wrap="square" lIns="0" tIns="0" rIns="0" bIns="0" rtlCol="0" anchor="ctr"/>
+          <a:lstStyle/>
+          <a:p>
+            <a:pPr algn="ctr" indent="0" marL="0">
+              <a:buNone/>
+            </a:pPr>
+            <a:r>
+              <a:rPr lang="en-US" sz="1100" b="1" dirty="0">
+                <a:solidFill>
+                  <a:schemeClr val="tx2"/>
+                </a:solidFill>
+              </a:rPr>
+              <a:t>「新しい商談が</a:t>
+            </a:r>
+            <a:endParaRPr lang="en-US" sz="1100" dirty="0"/>
+          </a:p>
+          <a:p>
+            <a:pPr algn="ctr" indent="0" marL="0">
+              <a:buNone/>
+            </a:pPr>
+            <a:r>
+              <a:rPr lang="en-US" sz="1100" b="1" dirty="0">
+                <a:solidFill>
+                  <a:schemeClr val="tx2"/>
+                </a:solidFill>
+              </a:rPr>
+              <a:t>決まった」</a:t>
+            </a:r>
+            <a:endParaRPr lang="en-US" sz="1100" dirty="0"/>
+          </a:p>
+        </p:txBody>
+      </p:sp>
+      <p:sp>
+        <p:nvSpPr>
+          <p:cNvPr id="25" name="Text 21"/>
+          <p:cNvSpPr txBox="1"/>
+          <p:nvPr/>
+        </p:nvSpPr>
+        <p:spPr>
+          <a:xfrm>
+            <a:off x="3474720" y="6492240"/>
+            <a:ext cx="3630168" cy="320040"/>
+          </a:xfrm>
+          <a:prstGeom prst="rect">
+            <a:avLst/>
+          </a:prstGeom>
+          <a:noFill/>
+          <a:ln/>
+        </p:spPr>
+        <p:txBody>
+          <a:bodyPr wrap="square" lIns="0" tIns="0" rIns="0" bIns="0" rtlCol="0" anchor="t"/>
+          <a:lstStyle/>
+          <a:p>
+            <a:pPr indent="0" marL="0">
+              <a:buNone/>
+            </a:pPr>
+            <a:r>
+              <a:rPr lang="en-US" sz="1500" b="1" dirty="0">
+                <a:solidFill>
+                  <a:schemeClr val="tx2"/>
+                </a:solidFill>
+              </a:rPr>
+              <a:t>なぜセットになるの？</a:t>
+            </a:r>
+            <a:endParaRPr lang="en-US" sz="1500" dirty="0"/>
+          </a:p>
+        </p:txBody>
+      </p:sp>
+      <p:sp>
+        <p:nvSpPr>
           <p:cNvPr id="26" name="Text 22"/>
           <p:cNvSpPr txBox="1"/>
           <p:nvPr/>
         </p:nvSpPr>
         <p:spPr>
           <a:xfrm>
-            <a:off x="5120640" y="8001000"/>
-            <a:ext cx="1371600" cy="502920"/>
+            <a:off x="3474720" y="6858000"/>
+            <a:ext cx="3630168" cy="1783080"/>
           </a:xfrm>
           <a:prstGeom prst="rect">
             <a:avLst/>
@@ -1926,10 +1940,47 @@
           <a:ln/>
         </p:spPr>
         <p:txBody>
-          <a:bodyPr wrap="square" lIns="0" tIns="0" rIns="0" bIns="0" rtlCol="0" anchor="ctr"/>
+          <a:bodyPr wrap="square" lIns="0" tIns="0" rIns="0" bIns="0" rtlCol="0" anchor="t"/>
           <a:lstStyle/>
           <a:p>
-            <a:pPr algn="ctr" indent="0" marL="0">
+            <a:pPr indent="0" marL="0">
+              <a:spcAft>
+                <a:spcPts val="500"/>
+              </a:spcAft>
+              <a:buNone/>
+            </a:pPr>
+            <a:r>
+              <a:rPr lang="en-US" sz="1200" dirty="0">
+                <a:solidFill>
+                  <a:schemeClr val="tx1"/>
+                </a:solidFill>
+              </a:rPr>
+              <a:t>世の中のマイナスのエネルギーが強くなりすぎて、アクティベーションだけではタマラのエネルギーを感じられない方が増えてきました。</a:t>
+            </a:r>
+            <a:endParaRPr lang="en-US" sz="1200" dirty="0"/>
+          </a:p>
+          <a:p>
+            <a:pPr indent="0" marL="0">
+              <a:spcAft>
+                <a:spcPts val="500"/>
+              </a:spcAft>
+              <a:buNone/>
+            </a:pPr>
+            <a:r>
+              <a:rPr lang="en-US" sz="1200" dirty="0">
+                <a:solidFill>
+                  <a:schemeClr val="tx1"/>
+                </a:solidFill>
+              </a:rPr>
+              <a:t>そこで、魂が進むのを邪魔するマイナスのエネルギーを消すファーストセッションと、ひとつになりました。</a:t>
+            </a:r>
+            <a:endParaRPr lang="en-US" sz="1200" dirty="0"/>
+          </a:p>
+          <a:p>
+            <a:pPr indent="0" marL="0">
+              <a:spcAft>
+                <a:spcPts val="500"/>
+              </a:spcAft>
               <a:buNone/>
             </a:pPr>
             <a:r>
@@ -1938,21 +1989,7 @@
                   <a:schemeClr val="tx2"/>
                 </a:solidFill>
               </a:rPr>
-              <a:t>「新しい商談が</a:t>
-            </a:r>
-            <a:endParaRPr lang="en-US" sz="1200" dirty="0"/>
-          </a:p>
-          <a:p>
-            <a:pPr algn="ctr" indent="0" marL="0">
-              <a:buNone/>
-            </a:pPr>
-            <a:r>
-              <a:rPr lang="en-US" sz="1200" b="1" dirty="0">
-                <a:solidFill>
-                  <a:schemeClr val="tx2"/>
-                </a:solidFill>
-              </a:rPr>
-              <a:t>決まった」</a:t>
+              <a:t>アクティベーションだけのメニューは、なくなります。</a:t>
             </a:r>
             <a:endParaRPr lang="en-US" sz="1200" dirty="0"/>
           </a:p>

--- a/20_Projects/海音_心体の調律/タマラ/20261021_タマラが大きく変わります_プラクティショナー向け.pptx
+++ b/20_Projects/海音_心体の調律/タマラ/20261021_タマラが大きく変わります_プラクティショナー向け.pptx
@@ -1172,7 +1172,7 @@
                   <a:schemeClr val="tx1"/>
                 </a:solidFill>
               </a:rPr>
-              <a:t>来年3月末で解散</a:t>
+              <a:t>来年3月末で役目を終えます</a:t>
             </a:r>
             <a:endParaRPr lang="en-US" sz="1400" dirty="0"/>
           </a:p>
@@ -1180,7 +1180,43 @@
       </p:sp>
       <p:sp>
         <p:nvSpPr>
-          <p:cNvPr id="6" name="npo-arrow"/>
+          <p:cNvPr id="6" name="Text 4"/>
+          <p:cNvSpPr txBox="1"/>
+          <p:nvPr/>
+        </p:nvSpPr>
+        <p:spPr>
+          <a:xfrm>
+            <a:off x="457200" y="2404872"/>
+            <a:ext cx="2834640" cy="182880"/>
+          </a:xfrm>
+          <a:prstGeom prst="rect">
+            <a:avLst/>
+          </a:prstGeom>
+          <a:noFill/>
+          <a:ln/>
+        </p:spPr>
+        <p:txBody>
+          <a:bodyPr wrap="square" lIns="0" tIns="0" rIns="0" bIns="0" rtlCol="0" anchor="t"/>
+          <a:lstStyle/>
+          <a:p>
+            <a:pPr algn="ctr" indent="0" marL="0">
+              <a:buNone/>
+            </a:pPr>
+            <a:r>
+              <a:rPr lang="en-US" sz="1000" dirty="0">
+                <a:solidFill>
+                  <a:schemeClr val="accent6"/>
+                </a:solidFill>
+              </a:rPr>
+              <a:t>（正式には「解散」の手続きになります）</a:t>
+            </a:r>
+            <a:endParaRPr lang="en-US" sz="1000" dirty="0"/>
+          </a:p>
+        </p:txBody>
+      </p:sp>
+      <p:sp>
+        <p:nvSpPr>
+          <p:cNvPr id="7" name="npo-arrow"/>
           <p:cNvSpPr/>
           <p:nvPr/>
         </p:nvSpPr>
@@ -1205,7 +1241,7 @@
       </p:sp>
       <p:sp>
         <p:nvSpPr>
-          <p:cNvPr id="7" name="self-box"/>
+          <p:cNvPr id="8" name="self-box"/>
           <p:cNvSpPr/>
           <p:nvPr/>
         </p:nvSpPr>
@@ -1232,7 +1268,7 @@
       </p:sp>
       <p:sp>
         <p:nvSpPr>
-          <p:cNvPr id="8" name="Text 6"/>
+          <p:cNvPr id="9" name="Text 7"/>
           <p:cNvSpPr txBox="1"/>
           <p:nvPr/>
         </p:nvSpPr>
@@ -1282,7 +1318,7 @@
       </p:sp>
       <p:sp>
         <p:nvSpPr>
-          <p:cNvPr id="9" name="chance-box"/>
+          <p:cNvPr id="10" name="chance-box"/>
           <p:cNvSpPr/>
           <p:nvPr/>
         </p:nvSpPr>
@@ -1309,7 +1345,7 @@
       </p:sp>
       <p:sp>
         <p:nvSpPr>
-          <p:cNvPr id="10" name="Text 8"/>
+          <p:cNvPr id="11" name="Text 9"/>
           <p:cNvSpPr txBox="1"/>
           <p:nvPr/>
         </p:nvSpPr>
@@ -1345,7 +1381,7 @@
       </p:sp>
       <p:sp>
         <p:nvSpPr>
-          <p:cNvPr id="11" name="Text 9"/>
+          <p:cNvPr id="12" name="Text 10"/>
           <p:cNvSpPr txBox="1"/>
           <p:nvPr/>
         </p:nvSpPr>
@@ -1409,7 +1445,7 @@
       </p:sp>
       <p:pic>
         <p:nvPicPr>
-          <p:cNvPr id="12" name="img-hourglass" descr="img/B.jpg">    </p:cNvPr>
+          <p:cNvPr id="13" name="img-hourglass" descr="img/B.jpg">    </p:cNvPr>
           <p:cNvPicPr>
             <a:picLocks noChangeAspect="1"/>
           </p:cNvPicPr>
@@ -1432,7 +1468,7 @@
       </p:pic>
       <p:sp>
         <p:nvSpPr>
-          <p:cNvPr id="13" name="until-box"/>
+          <p:cNvPr id="14" name="until-box"/>
           <p:cNvSpPr/>
           <p:nvPr/>
         </p:nvSpPr>
@@ -1459,7 +1495,7 @@
       </p:sp>
       <p:sp>
         <p:nvSpPr>
-          <p:cNvPr id="14" name="Text 11"/>
+          <p:cNvPr id="15" name="Text 12"/>
           <p:cNvSpPr txBox="1"/>
           <p:nvPr/>
         </p:nvSpPr>
@@ -1523,7 +1559,7 @@
       </p:sp>
       <p:sp>
         <p:nvSpPr>
-          <p:cNvPr id="15" name="date-arrow"/>
+          <p:cNvPr id="16" name="date-arrow"/>
           <p:cNvSpPr/>
           <p:nvPr/>
         </p:nvSpPr>
@@ -1548,7 +1584,7 @@
       </p:sp>
       <p:sp>
         <p:nvSpPr>
-          <p:cNvPr id="16" name="from-box"/>
+          <p:cNvPr id="17" name="from-box"/>
           <p:cNvSpPr/>
           <p:nvPr/>
         </p:nvSpPr>
@@ -1575,7 +1611,7 @@
       </p:sp>
       <p:sp>
         <p:nvSpPr>
-          <p:cNvPr id="17" name="Text 14"/>
+          <p:cNvPr id="18" name="Text 15"/>
           <p:cNvSpPr txBox="1"/>
           <p:nvPr/>
         </p:nvSpPr>
@@ -1639,7 +1675,7 @@
       </p:sp>
       <p:sp>
         <p:nvSpPr>
-          <p:cNvPr id="18" name="Text 15"/>
+          <p:cNvPr id="19" name="Text 16"/>
           <p:cNvSpPr txBox="1"/>
           <p:nvPr/>
         </p:nvSpPr>
@@ -1675,7 +1711,7 @@
       </p:sp>
       <p:pic>
         <p:nvPicPr>
-          <p:cNvPr id="19" name="img-path" descr="img/A.jpg">    </p:cNvPr>
+          <p:cNvPr id="20" name="img-path" descr="img/A.jpg">    </p:cNvPr>
           <p:cNvPicPr>
             <a:picLocks noChangeAspect="1"/>
           </p:cNvPicPr>
@@ -1698,7 +1734,7 @@
       </p:pic>
       <p:sp>
         <p:nvSpPr>
-          <p:cNvPr id="20" name="Text 16"/>
+          <p:cNvPr id="21" name="Text 17"/>
           <p:cNvSpPr txBox="1"/>
           <p:nvPr/>
         </p:nvSpPr>
@@ -1734,7 +1770,7 @@
       </p:sp>
       <p:sp>
         <p:nvSpPr>
-          <p:cNvPr id="21" name="voice0"/>
+          <p:cNvPr id="22" name="voice0"/>
           <p:cNvSpPr/>
           <p:nvPr/>
         </p:nvSpPr>
@@ -1761,7 +1797,7 @@
       </p:sp>
       <p:sp>
         <p:nvSpPr>
-          <p:cNvPr id="22" name="Text 18"/>
+          <p:cNvPr id="23" name="Text 19"/>
           <p:cNvSpPr txBox="1"/>
           <p:nvPr/>
         </p:nvSpPr>
@@ -1811,7 +1847,7 @@
       </p:sp>
       <p:sp>
         <p:nvSpPr>
-          <p:cNvPr id="23" name="voice1"/>
+          <p:cNvPr id="24" name="voice1"/>
           <p:cNvSpPr/>
           <p:nvPr/>
         </p:nvSpPr>
@@ -1838,7 +1874,7 @@
       </p:sp>
       <p:sp>
         <p:nvSpPr>
-          <p:cNvPr id="24" name="Text 20"/>
+          <p:cNvPr id="25" name="Text 21"/>
           <p:cNvSpPr txBox="1"/>
           <p:nvPr/>
         </p:nvSpPr>
@@ -1888,7 +1924,7 @@
       </p:sp>
       <p:sp>
         <p:nvSpPr>
-          <p:cNvPr id="25" name="Text 21"/>
+          <p:cNvPr id="26" name="Text 22"/>
           <p:cNvSpPr txBox="1"/>
           <p:nvPr/>
         </p:nvSpPr>
@@ -1924,7 +1960,7 @@
       </p:sp>
       <p:sp>
         <p:nvSpPr>
-          <p:cNvPr id="26" name="Text 22"/>
+          <p:cNvPr id="27" name="Text 23"/>
           <p:cNvSpPr txBox="1"/>
           <p:nvPr/>
         </p:nvSpPr>
@@ -1997,7 +2033,7 @@
       </p:sp>
       <p:sp>
         <p:nvSpPr>
-          <p:cNvPr id="27" name="reply-box"/>
+          <p:cNvPr id="28" name="reply-box"/>
           <p:cNvSpPr/>
           <p:nvPr/>
         </p:nvSpPr>
@@ -2024,7 +2060,7 @@
       </p:sp>
       <p:sp>
         <p:nvSpPr>
-          <p:cNvPr id="28" name="reply-icon-bg"/>
+          <p:cNvPr id="29" name="reply-icon-bg"/>
           <p:cNvSpPr/>
           <p:nvPr/>
         </p:nvSpPr>
@@ -2049,7 +2085,7 @@
       </p:sp>
       <p:pic>
         <p:nvPicPr>
-          <p:cNvPr id="29" name="reply-icon" descr="preencoded.png">    </p:cNvPr>
+          <p:cNvPr id="30" name="reply-icon" descr="preencoded.png">    </p:cNvPr>
           <p:cNvPicPr>
             <a:picLocks noChangeAspect="1"/>
           </p:cNvPicPr>
@@ -2073,7 +2109,7 @@
       </p:pic>
       <p:sp>
         <p:nvSpPr>
-          <p:cNvPr id="30" name="Text 25"/>
+          <p:cNvPr id="31" name="Text 26"/>
           <p:cNvSpPr txBox="1"/>
           <p:nvPr/>
         </p:nvSpPr>
@@ -2923,7 +2959,7 @@
                   <a:schemeClr val="tx1"/>
                 </a:solidFill>
               </a:rPr>
-              <a:t>会員の方に、解散についてのハガキか入力フォームが届きます。回答をお願いします</a:t>
+              <a:t>会員の方に、これからのことについてのハガキか入力フォームが届きます。回答をお願いします</a:t>
             </a:r>
             <a:endParaRPr lang="en-US" sz="1400" dirty="0"/>
           </a:p>

--- a/20_Projects/海音_心体の調律/タマラ/20261021_タマラが大きく変わります_プラクティショナー向け.pptx
+++ b/20_Projects/海音_心体の調律/タマラ/20261021_タマラが大きく変わります_プラクティショナー向け.pptx
@@ -4,15 +4,15 @@
   <p:sldMasterIdLst>
     <p:sldMasterId id="2147483648" r:id="rId1"/>
   </p:sldMasterIdLst>
+  <p:notesMasterIdLst>
+    <p:notesMasterId r:id="rId4"/>
+  </p:notesMasterIdLst>
   <p:sldIdLst>
     <p:sldId id="256" r:id="rId2"/>
     <p:sldId id="257" r:id="rId3"/>
   </p:sldIdLst>
-  <p:notesMasterIdLst>
-    <p:notesMasterId r:id="rId4"/>
-  </p:notesMasterIdLst>
-  <p:sldSz cx="7562088" cy="10689336"/>
-  <p:notesSz cx="10689336" cy="7562088"/>
+  <p:sldSz cx="7562850" cy="10688638"/>
+  <p:notesSz cx="10688638" cy="7562850"/>
   <p:defaultTextStyle>
     <a:lvl1pPr marL="0" algn="l" defTabSz="914400" rtl="0" eaLnBrk="1" latinLnBrk="0" hangingPunct="1">
       <a:defRPr sz="1800" kern="1200">
@@ -105,6 +105,11 @@
       </a:defRPr>
     </a:lvl9pPr>
   </p:defaultTextStyle>
+  <p:extLst>
+    <p:ext uri="{EFAFB233-063F-42B5-8137-9DF3F51BA10A}">
+      <p15:sldGuideLst xmlns:p15="http://schemas.microsoft.com/office/powerpoint/2012/main"/>
+    </p:ext>
+  </p:extLst>
 </p:presentation>
 </file>
 
@@ -130,241 +135,17 @@
           <a:chExt cx="0" cy="0"/>
         </a:xfrm>
       </p:grpSpPr>
-      <p:sp>
-        <p:nvSpPr>
-          <p:cNvPr id="2" name="Header Placeholder 1"/>
-          <p:cNvSpPr>
-            <a:spLocks noGrp="1"/>
-          </p:cNvSpPr>
-          <p:nvPr>
-            <p:ph type="hdr" sz="quarter"/>
-          </p:nvPr>
-        </p:nvSpPr>
-        <p:spPr>
-          <a:xfrm>
-            <a:off x="0" y="0"/>
-            <a:ext cx="2971800" cy="458788"/>
-          </a:xfrm>
-          <a:prstGeom prst="rect">
-            <a:avLst/>
-          </a:prstGeom>
-        </p:spPr>
-        <p:txBody>
-          <a:bodyPr vert="horz" lIns="91440" tIns="45720" rIns="91440" bIns="45720" rtlCol="0"/>
-          <a:lstStyle>
-            <a:lvl1pPr algn="l">
-              <a:defRPr sz="1200"/>
-            </a:lvl1pPr>
-          </a:lstStyle>
-          <a:p>
-            <a:endParaRPr lang="en-US"/>
-          </a:p>
-        </p:txBody>
-      </p:sp>
-      <p:sp>
-        <p:nvSpPr>
-          <p:cNvPr id="3" name="Date Placeholder 2"/>
-          <p:cNvSpPr>
-            <a:spLocks noGrp="1"/>
-          </p:cNvSpPr>
-          <p:nvPr>
-            <p:ph type="dt" idx="1"/>
-          </p:nvPr>
-        </p:nvSpPr>
-        <p:spPr>
-          <a:xfrm>
-            <a:off x="3884613" y="0"/>
-            <a:ext cx="2971800" cy="458788"/>
-          </a:xfrm>
-          <a:prstGeom prst="rect">
-            <a:avLst/>
-          </a:prstGeom>
-        </p:spPr>
-        <p:txBody>
-          <a:bodyPr vert="horz" lIns="91440" tIns="45720" rIns="91440" bIns="45720" rtlCol="0"/>
-          <a:lstStyle>
-            <a:lvl1pPr algn="r">
-              <a:defRPr sz="1200"/>
-            </a:lvl1pPr>
-          </a:lstStyle>
-          <a:p>
-            <a:fld id="{5282F153-3F37-0F45-9E97-73ACFA13230C}" type="datetimeFigureOut">
-              <a:rPr lang="en-US"/>
-              <a:t>7/23/19</a:t>
-            </a:fld>
-            <a:endParaRPr lang="en-US"/>
-          </a:p>
-        </p:txBody>
-      </p:sp>
-      <p:sp>
-        <p:nvSpPr>
-          <p:cNvPr id="4" name="Slide Image Placeholder 3"/>
-          <p:cNvSpPr>
-            <a:spLocks noGrp="1" noRot="1" noChangeAspect="1"/>
-          </p:cNvSpPr>
-          <p:nvPr>
-            <p:ph type="sldImg" idx="2"/>
-          </p:nvPr>
-        </p:nvSpPr>
-        <p:spPr>
-          <a:xfrm>
-            <a:off x="685800" y="1143000"/>
-            <a:ext cx="5486400" cy="3086100"/>
-          </a:xfrm>
-          <a:prstGeom prst="rect">
-            <a:avLst/>
-          </a:prstGeom>
-          <a:noFill/>
-          <a:ln w="12700">
-            <a:solidFill>
-              <a:prstClr val="black"/>
-            </a:solidFill>
-          </a:ln>
-        </p:spPr>
-        <p:txBody>
-          <a:bodyPr vert="horz" lIns="91440" tIns="45720" rIns="91440" bIns="45720" rtlCol="0" anchor="ctr"/>
-          <a:lstStyle/>
-          <a:p>
-            <a:endParaRPr lang="en-US"/>
-          </a:p>
-        </p:txBody>
-      </p:sp>
-      <p:sp>
-        <p:nvSpPr>
-          <p:cNvPr id="5" name="Notes Placeholder 4"/>
-          <p:cNvSpPr>
-            <a:spLocks noGrp="1"/>
-          </p:cNvSpPr>
-          <p:nvPr>
-            <p:ph type="body" sz="quarter" idx="3"/>
-          </p:nvPr>
-        </p:nvSpPr>
-        <p:spPr>
-          <a:xfrm>
-            <a:off x="685800" y="4400550"/>
-            <a:ext cx="5486400" cy="3600450"/>
-          </a:xfrm>
-          <a:prstGeom prst="rect">
-            <a:avLst/>
-          </a:prstGeom>
-        </p:spPr>
-        <p:txBody>
-          <a:bodyPr vert="horz" lIns="91440" tIns="45720" rIns="91440" bIns="45720" rtlCol="0"/>
-          <a:lstStyle/>
-          <a:p>
-            <a:pPr lvl="0"/>
-            <a:r>
-              <a:rPr lang="en-US"/>
-              <a:t>Click to edit Master text styles</a:t>
-            </a:r>
-          </a:p>
-          <a:p>
-            <a:pPr lvl="1"/>
-            <a:r>
-              <a:rPr lang="en-US"/>
-              <a:t>Second level</a:t>
-            </a:r>
-          </a:p>
-          <a:p>
-            <a:pPr lvl="2"/>
-            <a:r>
-              <a:rPr lang="en-US"/>
-              <a:t>Third level</a:t>
-            </a:r>
-          </a:p>
-          <a:p>
-            <a:pPr lvl="3"/>
-            <a:r>
-              <a:rPr lang="en-US"/>
-              <a:t>Fourth level</a:t>
-            </a:r>
-          </a:p>
-          <a:p>
-            <a:pPr lvl="4"/>
-            <a:r>
-              <a:rPr lang="en-US"/>
-              <a:t>Fifth level</a:t>
-            </a:r>
-          </a:p>
-        </p:txBody>
-      </p:sp>
-      <p:sp>
-        <p:nvSpPr>
-          <p:cNvPr id="6" name="Footer Placeholder 5"/>
-          <p:cNvSpPr>
-            <a:spLocks noGrp="1"/>
-          </p:cNvSpPr>
-          <p:nvPr>
-            <p:ph type="ftr" sz="quarter" idx="4"/>
-          </p:nvPr>
-        </p:nvSpPr>
-        <p:spPr>
-          <a:xfrm>
-            <a:off x="0" y="8685213"/>
-            <a:ext cx="2971800" cy="458787"/>
-          </a:xfrm>
-          <a:prstGeom prst="rect">
-            <a:avLst/>
-          </a:prstGeom>
-        </p:spPr>
-        <p:txBody>
-          <a:bodyPr vert="horz" lIns="91440" tIns="45720" rIns="91440" bIns="45720" rtlCol="0" anchor="b"/>
-          <a:lstStyle>
-            <a:lvl1pPr algn="l">
-              <a:defRPr sz="1200"/>
-            </a:lvl1pPr>
-          </a:lstStyle>
-          <a:p>
-            <a:endParaRPr lang="en-US"/>
-          </a:p>
-        </p:txBody>
-      </p:sp>
-      <p:sp>
-        <p:nvSpPr>
-          <p:cNvPr id="7" name="Slide Number Placeholder 6"/>
-          <p:cNvSpPr>
-            <a:spLocks noGrp="1"/>
-          </p:cNvSpPr>
-          <p:nvPr>
-            <p:ph type="sldNum" sz="quarter" idx="5"/>
-          </p:nvPr>
-        </p:nvSpPr>
-        <p:spPr>
-          <a:xfrm>
-            <a:off x="3884613" y="8685213"/>
-            <a:ext cx="2971800" cy="458787"/>
-          </a:xfrm>
-          <a:prstGeom prst="rect">
-            <a:avLst/>
-          </a:prstGeom>
-        </p:spPr>
-        <p:txBody>
-          <a:bodyPr vert="horz" lIns="91440" tIns="45720" rIns="91440" bIns="45720" rtlCol="0" anchor="b"/>
-          <a:lstStyle>
-            <a:lvl1pPr algn="r">
-              <a:defRPr sz="1200"/>
-            </a:lvl1pPr>
-          </a:lstStyle>
-          <a:p>
-            <a:fld id="{CE5E9CC1-C706-0F49-92D6-E571CC5EEA8F}" type="slidenum">
-              <a:rPr lang="en-US"/>
-              <a:t>‹#›</a:t>
-            </a:fld>
-            <a:endParaRPr lang="en-US"/>
-          </a:p>
-        </p:txBody>
-      </p:sp>
     </p:spTree>
     <p:extLst>
       <p:ext uri="{BB962C8B-B14F-4D97-AF65-F5344CB8AC3E}">
-        <p14:creationId xmlns:p14="http://schemas.microsoft.com/office/powerpoint/2010/main" val="1024086991"/>
+        <p14:creationId xmlns:p14="http://schemas.microsoft.com/office/powerpoint/2010/main" val="2900002266"/>
       </p:ext>
     </p:extLst>
   </p:cSld>
   <p:clrMap bg1="lt1" tx1="dk1" bg2="lt2" tx2="dk2" accent1="accent1" accent2="accent2" accent3="accent3" accent4="accent4" accent5="accent5" accent6="accent6" hlink="hlink" folHlink="folHlink"/>
   <p:notesStyle>
     <a:lvl1pPr marL="0" algn="l" defTabSz="914400" rtl="0" eaLnBrk="1" latinLnBrk="0" hangingPunct="1">
-      <a:defRPr sz="1200" kern="1200">
+      <a:defRPr kumimoji="1" sz="1200" kern="1200">
         <a:solidFill>
           <a:schemeClr val="tx1"/>
         </a:solidFill>
@@ -374,7 +155,7 @@
       </a:defRPr>
     </a:lvl1pPr>
     <a:lvl2pPr marL="457200" algn="l" defTabSz="914400" rtl="0" eaLnBrk="1" latinLnBrk="0" hangingPunct="1">
-      <a:defRPr sz="1200" kern="1200">
+      <a:defRPr kumimoji="1" sz="1200" kern="1200">
         <a:solidFill>
           <a:schemeClr val="tx1"/>
         </a:solidFill>
@@ -384,7 +165,7 @@
       </a:defRPr>
     </a:lvl2pPr>
     <a:lvl3pPr marL="914400" algn="l" defTabSz="914400" rtl="0" eaLnBrk="1" latinLnBrk="0" hangingPunct="1">
-      <a:defRPr sz="1200" kern="1200">
+      <a:defRPr kumimoji="1" sz="1200" kern="1200">
         <a:solidFill>
           <a:schemeClr val="tx1"/>
         </a:solidFill>
@@ -394,7 +175,7 @@
       </a:defRPr>
     </a:lvl3pPr>
     <a:lvl4pPr marL="1371600" algn="l" defTabSz="914400" rtl="0" eaLnBrk="1" latinLnBrk="0" hangingPunct="1">
-      <a:defRPr sz="1200" kern="1200">
+      <a:defRPr kumimoji="1" sz="1200" kern="1200">
         <a:solidFill>
           <a:schemeClr val="tx1"/>
         </a:solidFill>
@@ -404,7 +185,7 @@
       </a:defRPr>
     </a:lvl4pPr>
     <a:lvl5pPr marL="1828800" algn="l" defTabSz="914400" rtl="0" eaLnBrk="1" latinLnBrk="0" hangingPunct="1">
-      <a:defRPr sz="1200" kern="1200">
+      <a:defRPr kumimoji="1" sz="1200" kern="1200">
         <a:solidFill>
           <a:schemeClr val="tx1"/>
         </a:solidFill>
@@ -414,7 +195,7 @@
       </a:defRPr>
     </a:lvl5pPr>
     <a:lvl6pPr marL="2286000" algn="l" defTabSz="914400" rtl="0" eaLnBrk="1" latinLnBrk="0" hangingPunct="1">
-      <a:defRPr sz="1200" kern="1200">
+      <a:defRPr kumimoji="1" sz="1200" kern="1200">
         <a:solidFill>
           <a:schemeClr val="tx1"/>
         </a:solidFill>
@@ -424,7 +205,7 @@
       </a:defRPr>
     </a:lvl6pPr>
     <a:lvl7pPr marL="2743200" algn="l" defTabSz="914400" rtl="0" eaLnBrk="1" latinLnBrk="0" hangingPunct="1">
-      <a:defRPr sz="1200" kern="1200">
+      <a:defRPr kumimoji="1" sz="1200" kern="1200">
         <a:solidFill>
           <a:schemeClr val="tx1"/>
         </a:solidFill>
@@ -434,7 +215,7 @@
       </a:defRPr>
     </a:lvl7pPr>
     <a:lvl8pPr marL="3200400" algn="l" defTabSz="914400" rtl="0" eaLnBrk="1" latinLnBrk="0" hangingPunct="1">
-      <a:defRPr sz="1200" kern="1200">
+      <a:defRPr kumimoji="1" sz="1200" kern="1200">
         <a:solidFill>
           <a:schemeClr val="tx1"/>
         </a:solidFill>
@@ -444,7 +225,7 @@
       </a:defRPr>
     </a:lvl8pPr>
     <a:lvl9pPr marL="3657600" algn="l" defTabSz="914400" rtl="0" eaLnBrk="1" latinLnBrk="0" hangingPunct="1">
-      <a:defRPr sz="1200" kern="1200">
+      <a:defRPr kumimoji="1" sz="1200" kern="1200">
         <a:solidFill>
           <a:schemeClr val="tx1"/>
         </a:solidFill>
@@ -501,10 +282,6 @@
           <a:bodyPr/>
           <a:lstStyle/>
           <a:p>
-            <a:r>
-              <a:rPr lang="en-US" dirty="0"/>
-              <a:t/>
-            </a:r>
             <a:endParaRPr lang="en-US" dirty="0"/>
           </a:p>
         </p:txBody>
@@ -589,10 +366,6 @@
           <a:bodyPr/>
           <a:lstStyle/>
           <a:p>
-            <a:r>
-              <a:rPr lang="en-US" dirty="0"/>
-              <a:t/>
-            </a:r>
             <a:endParaRPr lang="en-US" dirty="0"/>
           </a:p>
         </p:txBody>
@@ -671,6 +444,7 @@
         <a:solidFill>
           <a:schemeClr val="bg1"/>
         </a:solidFill>
+        <a:effectLst/>
       </p:bgPr>
     </p:bg>
     <p:spTree>
@@ -708,7 +482,7 @@
           <a:bodyPr wrap="square" lIns="0" tIns="0" rIns="0" bIns="0" rtlCol="0" anchor="ctr"/>
           <a:lstStyle/>
           <a:p>
-            <a:pPr algn="r" indent="0" marL="0">
+            <a:pPr marL="0" indent="0" algn="r">
               <a:buNone/>
             </a:pPr>
             <a:r>
@@ -734,6 +508,11 @@
 <file path=ppt/slideMasters/slideMaster1.xml><?xml version="1.0" encoding="utf-8"?>
 <p:sldMaster xmlns:a="http://schemas.openxmlformats.org/drawingml/2006/main" xmlns:r="http://schemas.openxmlformats.org/officeDocument/2006/relationships" xmlns:p="http://schemas.openxmlformats.org/presentationml/2006/main">
   <p:cSld>
+    <p:bg>
+      <p:bgRef idx="1001">
+        <a:schemeClr val="bg1"/>
+      </p:bgRef>
+    </p:bg>
     <p:spTree>
       <p:nvGrpSpPr>
         <p:cNvPr id="1" name=""/>
@@ -1047,7 +826,7 @@
           <a:bodyPr wrap="square" lIns="0" tIns="0" rIns="0" bIns="0" rtlCol="0" anchor="t"/>
           <a:lstStyle/>
           <a:p>
-            <a:pPr indent="0" marL="0">
+            <a:pPr marL="0" indent="0">
               <a:buNone/>
             </a:pPr>
             <a:r>
@@ -1086,7 +865,7 @@
           <a:bodyPr wrap="square" lIns="0" tIns="0" rIns="0" bIns="0" rtlCol="0" anchor="t"/>
           <a:lstStyle/>
           <a:p>
-            <a:pPr indent="0" marL="0">
+            <a:pPr marL="0" indent="0">
               <a:buNone/>
             </a:pPr>
             <a:r>
@@ -1127,6 +906,13 @@
             <a:prstDash val="solid"/>
           </a:ln>
         </p:spPr>
+        <p:txBody>
+          <a:bodyPr/>
+          <a:lstStyle/>
+          <a:p>
+            <a:endParaRPr lang="ja-JP" altLang="en-US"/>
+          </a:p>
+        </p:txBody>
       </p:sp>
       <p:sp>
         <p:nvSpPr>
@@ -1149,7 +935,7 @@
           <a:bodyPr wrap="square" lIns="0" tIns="0" rIns="0" bIns="0" rtlCol="0" anchor="ctr"/>
           <a:lstStyle/>
           <a:p>
-            <a:pPr algn="ctr" indent="0" marL="0">
+            <a:pPr marL="0" indent="0" algn="ctr">
               <a:buNone/>
             </a:pPr>
             <a:r>
@@ -1163,7 +949,7 @@
             <a:endParaRPr lang="en-US" sz="1400" dirty="0"/>
           </a:p>
           <a:p>
-            <a:pPr algn="ctr" indent="0" marL="0">
+            <a:pPr marL="0" indent="0" algn="ctr">
               <a:buNone/>
             </a:pPr>
             <a:r>
@@ -1199,7 +985,7 @@
           <a:bodyPr wrap="square" lIns="0" tIns="0" rIns="0" bIns="0" rtlCol="0" anchor="t"/>
           <a:lstStyle/>
           <a:p>
-            <a:pPr algn="ctr" indent="0" marL="0">
+            <a:pPr marL="0" indent="0" algn="ctr">
               <a:buNone/>
             </a:pPr>
             <a:r>
@@ -1238,6 +1024,13 @@
             <a:prstDash val="solid"/>
           </a:ln>
         </p:spPr>
+        <p:txBody>
+          <a:bodyPr/>
+          <a:lstStyle/>
+          <a:p>
+            <a:endParaRPr lang="ja-JP" altLang="en-US"/>
+          </a:p>
+        </p:txBody>
       </p:sp>
       <p:sp>
         <p:nvSpPr>
@@ -1265,6 +1058,13 @@
             <a:prstDash val="solid"/>
           </a:ln>
         </p:spPr>
+        <p:txBody>
+          <a:bodyPr/>
+          <a:lstStyle/>
+          <a:p>
+            <a:endParaRPr lang="ja-JP" altLang="en-US"/>
+          </a:p>
+        </p:txBody>
       </p:sp>
       <p:sp>
         <p:nvSpPr>
@@ -1287,7 +1087,7 @@
           <a:bodyPr wrap="square" lIns="0" tIns="0" rIns="0" bIns="0" rtlCol="0" anchor="ctr"/>
           <a:lstStyle/>
           <a:p>
-            <a:pPr algn="ctr" indent="0" marL="0">
+            <a:pPr marL="0" indent="0" algn="ctr">
               <a:buNone/>
             </a:pPr>
             <a:r>
@@ -1301,7 +1101,7 @@
             <a:endParaRPr lang="en-US" sz="1400" dirty="0"/>
           </a:p>
           <a:p>
-            <a:pPr algn="ctr" indent="0" marL="0">
+            <a:pPr marL="0" indent="0" algn="ctr">
               <a:buNone/>
             </a:pPr>
             <a:r>
@@ -1342,6 +1142,13 @@
             <a:prstDash val="solid"/>
           </a:ln>
         </p:spPr>
+        <p:txBody>
+          <a:bodyPr/>
+          <a:lstStyle/>
+          <a:p>
+            <a:endParaRPr lang="ja-JP" altLang="en-US"/>
+          </a:p>
+        </p:txBody>
       </p:sp>
       <p:sp>
         <p:nvSpPr>
@@ -1364,7 +1171,7 @@
           <a:bodyPr wrap="square" lIns="0" tIns="0" rIns="0" bIns="0" rtlCol="0" anchor="t"/>
           <a:lstStyle/>
           <a:p>
-            <a:pPr indent="0" marL="0">
+            <a:pPr marL="0" indent="0">
               <a:buNone/>
             </a:pPr>
             <a:r>
@@ -1400,7 +1207,7 @@
           <a:bodyPr wrap="square" lIns="0" tIns="0" rIns="0" bIns="0" rtlCol="0" anchor="t"/>
           <a:lstStyle/>
           <a:p>
-            <a:pPr indent="0" marL="0">
+            <a:pPr marL="0" indent="0">
               <a:buNone/>
             </a:pPr>
             <a:r>
@@ -1414,7 +1221,7 @@
             <a:endParaRPr lang="en-US" sz="2200" dirty="0"/>
           </a:p>
           <a:p>
-            <a:pPr indent="0" marL="0">
+            <a:pPr marL="0" indent="0">
               <a:buNone/>
             </a:pPr>
             <a:r>
@@ -1428,7 +1235,7 @@
             <a:endParaRPr lang="en-US" sz="2200" dirty="0"/>
           </a:p>
           <a:p>
-            <a:pPr indent="0" marL="0">
+            <a:pPr marL="0" indent="0">
               <a:buNone/>
             </a:pPr>
             <a:r>
@@ -1445,15 +1252,15 @@
       </p:sp>
       <p:pic>
         <p:nvPicPr>
-          <p:cNvPr id="13" name="img-hourglass" descr="img/B.jpg">    </p:cNvPr>
+          <p:cNvPr id="13" name="img-hourglass" descr="img/B.jpg"/>
           <p:cNvPicPr>
             <a:picLocks noChangeAspect="1"/>
           </p:cNvPicPr>
           <p:nvPr/>
         </p:nvPicPr>
         <p:blipFill>
-          <a:blip r:embed="rId1"/>
-          <a:srcRect l="0" r="0" t="0" b="0"/>
+          <a:blip r:embed="rId3"/>
+          <a:srcRect/>
           <a:stretch/>
         </p:blipFill>
         <p:spPr>
@@ -1492,6 +1299,13 @@
             <a:prstDash val="solid"/>
           </a:ln>
         </p:spPr>
+        <p:txBody>
+          <a:bodyPr/>
+          <a:lstStyle/>
+          <a:p>
+            <a:endParaRPr lang="ja-JP" altLang="en-US"/>
+          </a:p>
+        </p:txBody>
       </p:sp>
       <p:sp>
         <p:nvSpPr>
@@ -1514,7 +1328,7 @@
           <a:bodyPr wrap="square" lIns="0" tIns="0" rIns="0" bIns="0" rtlCol="0" anchor="ctr"/>
           <a:lstStyle/>
           <a:p>
-            <a:pPr algn="ctr" indent="0" marL="0">
+            <a:pPr marL="0" indent="0" algn="ctr">
               <a:buNone/>
             </a:pPr>
             <a:r>
@@ -1528,7 +1342,7 @@
             <a:endParaRPr lang="en-US" sz="1600" dirty="0"/>
           </a:p>
           <a:p>
-            <a:pPr algn="ctr" indent="0" marL="0">
+            <a:pPr marL="0" indent="0" algn="ctr">
               <a:buNone/>
             </a:pPr>
             <a:r>
@@ -1542,7 +1356,7 @@
             <a:endParaRPr lang="en-US" sz="1600" dirty="0"/>
           </a:p>
           <a:p>
-            <a:pPr algn="ctr" indent="0" marL="0">
+            <a:pPr marL="0" indent="0" algn="ctr">
               <a:buNone/>
             </a:pPr>
             <a:r>
@@ -1581,6 +1395,13 @@
             <a:prstDash val="solid"/>
           </a:ln>
         </p:spPr>
+        <p:txBody>
+          <a:bodyPr/>
+          <a:lstStyle/>
+          <a:p>
+            <a:endParaRPr lang="ja-JP" altLang="en-US"/>
+          </a:p>
+        </p:txBody>
       </p:sp>
       <p:sp>
         <p:nvSpPr>
@@ -1608,6 +1429,13 @@
             <a:prstDash val="solid"/>
           </a:ln>
         </p:spPr>
+        <p:txBody>
+          <a:bodyPr/>
+          <a:lstStyle/>
+          <a:p>
+            <a:endParaRPr lang="ja-JP" altLang="en-US"/>
+          </a:p>
+        </p:txBody>
       </p:sp>
       <p:sp>
         <p:nvSpPr>
@@ -1630,7 +1458,7 @@
           <a:bodyPr wrap="square" lIns="0" tIns="0" rIns="0" bIns="0" rtlCol="0" anchor="ctr"/>
           <a:lstStyle/>
           <a:p>
-            <a:pPr algn="ctr" indent="0" marL="0">
+            <a:pPr marL="0" indent="0" algn="ctr">
               <a:buNone/>
             </a:pPr>
             <a:r>
@@ -1644,7 +1472,7 @@
             <a:endParaRPr lang="en-US" sz="1600" dirty="0"/>
           </a:p>
           <a:p>
-            <a:pPr algn="ctr" indent="0" marL="0">
+            <a:pPr marL="0" indent="0" algn="ctr">
               <a:buNone/>
             </a:pPr>
             <a:r>
@@ -1658,7 +1486,7 @@
             <a:endParaRPr lang="en-US" sz="1600" dirty="0"/>
           </a:p>
           <a:p>
-            <a:pPr algn="ctr" indent="0" marL="0">
+            <a:pPr marL="0" indent="0" algn="ctr">
               <a:buNone/>
             </a:pPr>
             <a:r>
@@ -1694,7 +1522,7 @@
           <a:bodyPr wrap="square" lIns="0" tIns="0" rIns="0" bIns="0" rtlCol="0" anchor="t"/>
           <a:lstStyle/>
           <a:p>
-            <a:pPr indent="0" marL="0">
+            <a:pPr marL="0" indent="0">
               <a:buNone/>
             </a:pPr>
             <a:r>
@@ -1711,15 +1539,15 @@
       </p:sp>
       <p:pic>
         <p:nvPicPr>
-          <p:cNvPr id="20" name="img-path" descr="img/A.jpg">    </p:cNvPr>
+          <p:cNvPr id="20" name="img-path" descr="img/A.jpg"/>
           <p:cNvPicPr>
             <a:picLocks noChangeAspect="1"/>
           </p:cNvPicPr>
           <p:nvPr/>
         </p:nvPicPr>
         <p:blipFill>
-          <a:blip r:embed="rId2"/>
-          <a:srcRect l="0" r="0" t="0" b="0"/>
+          <a:blip r:embed="rId4"/>
+          <a:srcRect/>
           <a:stretch/>
         </p:blipFill>
         <p:spPr>
@@ -1753,7 +1581,7 @@
           <a:bodyPr wrap="square" lIns="0" tIns="0" rIns="0" bIns="0" rtlCol="0" anchor="t"/>
           <a:lstStyle/>
           <a:p>
-            <a:pPr indent="0" marL="0">
+            <a:pPr marL="0" indent="0">
               <a:buNone/>
             </a:pPr>
             <a:r>
@@ -1794,6 +1622,13 @@
             <a:prstDash val="solid"/>
           </a:ln>
         </p:spPr>
+        <p:txBody>
+          <a:bodyPr/>
+          <a:lstStyle/>
+          <a:p>
+            <a:endParaRPr lang="ja-JP" altLang="en-US"/>
+          </a:p>
+        </p:txBody>
       </p:sp>
       <p:sp>
         <p:nvSpPr>
@@ -1816,7 +1651,7 @@
           <a:bodyPr wrap="square" lIns="0" tIns="0" rIns="0" bIns="0" rtlCol="0" anchor="ctr"/>
           <a:lstStyle/>
           <a:p>
-            <a:pPr algn="ctr" indent="0" marL="0">
+            <a:pPr marL="0" indent="0" algn="ctr">
               <a:buNone/>
             </a:pPr>
             <a:r>
@@ -1830,7 +1665,7 @@
             <a:endParaRPr lang="en-US" sz="1100" dirty="0"/>
           </a:p>
           <a:p>
-            <a:pPr algn="ctr" indent="0" marL="0">
+            <a:pPr marL="0" indent="0" algn="ctr">
               <a:buNone/>
             </a:pPr>
             <a:r>
@@ -1871,6 +1706,13 @@
             <a:prstDash val="solid"/>
           </a:ln>
         </p:spPr>
+        <p:txBody>
+          <a:bodyPr/>
+          <a:lstStyle/>
+          <a:p>
+            <a:endParaRPr lang="ja-JP" altLang="en-US"/>
+          </a:p>
+        </p:txBody>
       </p:sp>
       <p:sp>
         <p:nvSpPr>
@@ -1893,7 +1735,7 @@
           <a:bodyPr wrap="square" lIns="0" tIns="0" rIns="0" bIns="0" rtlCol="0" anchor="ctr"/>
           <a:lstStyle/>
           <a:p>
-            <a:pPr algn="ctr" indent="0" marL="0">
+            <a:pPr marL="0" indent="0" algn="ctr">
               <a:buNone/>
             </a:pPr>
             <a:r>
@@ -1907,7 +1749,7 @@
             <a:endParaRPr lang="en-US" sz="1100" dirty="0"/>
           </a:p>
           <a:p>
-            <a:pPr algn="ctr" indent="0" marL="0">
+            <a:pPr marL="0" indent="0" algn="ctr">
               <a:buNone/>
             </a:pPr>
             <a:r>
@@ -1943,7 +1785,7 @@
           <a:bodyPr wrap="square" lIns="0" tIns="0" rIns="0" bIns="0" rtlCol="0" anchor="t"/>
           <a:lstStyle/>
           <a:p>
-            <a:pPr indent="0" marL="0">
+            <a:pPr marL="0" indent="0">
               <a:buNone/>
             </a:pPr>
             <a:r>
@@ -1979,7 +1821,7 @@
           <a:bodyPr wrap="square" lIns="0" tIns="0" rIns="0" bIns="0" rtlCol="0" anchor="t"/>
           <a:lstStyle/>
           <a:p>
-            <a:pPr indent="0" marL="0">
+            <a:pPr marL="0" indent="0">
               <a:spcAft>
                 <a:spcPts val="500"/>
               </a:spcAft>
@@ -1996,7 +1838,7 @@
             <a:endParaRPr lang="en-US" sz="1200" dirty="0"/>
           </a:p>
           <a:p>
-            <a:pPr indent="0" marL="0">
+            <a:pPr marL="0" indent="0">
               <a:spcAft>
                 <a:spcPts val="500"/>
               </a:spcAft>
@@ -2013,7 +1855,7 @@
             <a:endParaRPr lang="en-US" sz="1200" dirty="0"/>
           </a:p>
           <a:p>
-            <a:pPr indent="0" marL="0">
+            <a:pPr marL="0" indent="0">
               <a:spcAft>
                 <a:spcPts val="500"/>
               </a:spcAft>
@@ -2057,6 +1899,13 @@
             <a:prstDash val="solid"/>
           </a:ln>
         </p:spPr>
+        <p:txBody>
+          <a:bodyPr/>
+          <a:lstStyle/>
+          <a:p>
+            <a:endParaRPr lang="ja-JP" altLang="en-US"/>
+          </a:p>
+        </p:txBody>
       </p:sp>
       <p:sp>
         <p:nvSpPr>
@@ -2082,17 +1931,24 @@
             <a:prstDash val="solid"/>
           </a:ln>
         </p:spPr>
+        <p:txBody>
+          <a:bodyPr/>
+          <a:lstStyle/>
+          <a:p>
+            <a:endParaRPr lang="ja-JP" altLang="en-US"/>
+          </a:p>
+        </p:txBody>
       </p:sp>
       <p:pic>
         <p:nvPicPr>
-          <p:cNvPr id="30" name="reply-icon" descr="preencoded.png">    </p:cNvPr>
+          <p:cNvPr id="30" name="reply-icon" descr="preencoded.png"/>
           <p:cNvPicPr>
             <a:picLocks noChangeAspect="1"/>
           </p:cNvPicPr>
           <p:nvPr/>
         </p:nvPicPr>
         <p:blipFill>
-          <a:blip r:embed="rId3"/>
+          <a:blip r:embed="rId5"/>
           <a:stretch>
             <a:fillRect/>
           </a:stretch>
@@ -2128,7 +1984,7 @@
           <a:bodyPr wrap="square" lIns="0" tIns="0" rIns="0" bIns="0" rtlCol="0" anchor="ctr"/>
           <a:lstStyle/>
           <a:p>
-            <a:pPr indent="0" marL="0">
+            <a:pPr marL="0" indent="0">
               <a:spcAft>
                 <a:spcPts val="300"/>
               </a:spcAft>
@@ -2145,7 +2001,7 @@
             <a:endParaRPr lang="en-US" sz="1600" dirty="0"/>
           </a:p>
           <a:p>
-            <a:pPr indent="0" marL="0">
+            <a:pPr marL="0" indent="0">
               <a:spcAft>
                 <a:spcPts val="300"/>
               </a:spcAft>
@@ -2162,7 +2018,7 @@
             <a:endParaRPr lang="en-US" sz="1600" dirty="0"/>
           </a:p>
           <a:p>
-            <a:pPr indent="0" marL="0">
+            <a:pPr marL="0" indent="0">
               <a:spcAft>
                 <a:spcPts val="300"/>
               </a:spcAft>
@@ -2226,7 +2082,7 @@
           <a:bodyPr wrap="square" lIns="0" tIns="0" rIns="0" bIns="0" rtlCol="0" anchor="t"/>
           <a:lstStyle/>
           <a:p>
-            <a:pPr indent="0" marL="0">
+            <a:pPr marL="0" indent="0">
               <a:buNone/>
             </a:pPr>
             <a:r>
@@ -2243,15 +2099,15 @@
       </p:sp>
       <p:pic>
         <p:nvPicPr>
-          <p:cNvPr id="3" name="img-circle" descr="img/C.jpg">    </p:cNvPr>
+          <p:cNvPr id="3" name="img-circle" descr="img/C.jpg"/>
           <p:cNvPicPr>
             <a:picLocks noChangeAspect="1"/>
           </p:cNvPicPr>
           <p:nvPr/>
         </p:nvPicPr>
         <p:blipFill>
-          <a:blip r:embed="rId1"/>
-          <a:srcRect l="0" r="0" t="0" b="0"/>
+          <a:blip r:embed="rId3"/>
+          <a:srcRect/>
           <a:stretch/>
         </p:blipFill>
         <p:spPr>
@@ -2290,6 +2146,13 @@
             <a:prstDash val="solid"/>
           </a:ln>
         </p:spPr>
+        <p:txBody>
+          <a:bodyPr/>
+          <a:lstStyle/>
+          <a:p>
+            <a:endParaRPr lang="ja-JP" altLang="en-US"/>
+          </a:p>
+        </p:txBody>
       </p:sp>
       <p:sp>
         <p:nvSpPr>
@@ -2315,306 +2178,17 @@
             <a:prstDash val="solid"/>
           </a:ln>
         </p:spPr>
+        <p:txBody>
+          <a:bodyPr/>
+          <a:lstStyle/>
+          <a:p>
+            <a:endParaRPr lang="ja-JP" altLang="en-US"/>
+          </a:p>
+        </p:txBody>
       </p:sp>
       <p:pic>
         <p:nvPicPr>
-          <p:cNvPr id="6" name="keep0-icon" descr="preencoded.png">    </p:cNvPr>
-          <p:cNvPicPr>
-            <a:picLocks noChangeAspect="1"/>
-          </p:cNvPicPr>
-          <p:nvPr/>
-        </p:nvPicPr>
-        <p:blipFill>
-          <a:blip r:embed="rId2"/>
-          <a:stretch>
-            <a:fillRect/>
-          </a:stretch>
-        </p:blipFill>
-        <p:spPr>
-          <a:xfrm>
-            <a:off x="770839" y="4291279"/>
-            <a:ext cx="332842" cy="332842"/>
-          </a:xfrm>
-          <a:prstGeom prst="rect">
-            <a:avLst/>
-          </a:prstGeom>
-        </p:spPr>
-      </p:pic>
-      <p:sp>
-        <p:nvSpPr>
-          <p:cNvPr id="7" name="Text 3"/>
-          <p:cNvSpPr txBox="1"/>
-          <p:nvPr/>
-        </p:nvSpPr>
-        <p:spPr>
-          <a:xfrm>
-            <a:off x="1417320" y="4069080"/>
-            <a:ext cx="1737360" cy="777240"/>
-          </a:xfrm>
-          <a:prstGeom prst="rect">
-            <a:avLst/>
-          </a:prstGeom>
-          <a:noFill/>
-          <a:ln/>
-        </p:spPr>
-        <p:txBody>
-          <a:bodyPr wrap="square" lIns="0" tIns="0" rIns="0" bIns="0" rtlCol="0" anchor="ctr"/>
-          <a:lstStyle/>
-          <a:p>
-            <a:pPr indent="0" marL="0">
-              <a:buNone/>
-            </a:pPr>
-            <a:r>
-              <a:rPr lang="en-US" sz="1500" b="1" dirty="0">
-                <a:solidFill>
-                  <a:schemeClr val="tx2"/>
-                </a:solidFill>
-              </a:rPr>
-              <a:t>タマラのエネルギー</a:t>
-            </a:r>
-            <a:endParaRPr lang="en-US" sz="1500" dirty="0"/>
-          </a:p>
-        </p:txBody>
-      </p:sp>
-      <p:sp>
-        <p:nvSpPr>
-          <p:cNvPr id="8" name="Text 4"/>
-          <p:cNvSpPr txBox="1"/>
-          <p:nvPr/>
-        </p:nvSpPr>
-        <p:spPr>
-          <a:xfrm>
-            <a:off x="3200400" y="4069080"/>
-            <a:ext cx="3721608" cy="777240"/>
-          </a:xfrm>
-          <a:prstGeom prst="rect">
-            <a:avLst/>
-          </a:prstGeom>
-          <a:noFill/>
-          <a:ln/>
-        </p:spPr>
-        <p:txBody>
-          <a:bodyPr wrap="square" lIns="0" tIns="0" rIns="0" bIns="0" rtlCol="0" anchor="ctr"/>
-          <a:lstStyle/>
-          <a:p>
-            <a:pPr indent="0" marL="0">
-              <a:buNone/>
-            </a:pPr>
-            <a:r>
-              <a:rPr lang="en-US" sz="1300" dirty="0">
-                <a:solidFill>
-                  <a:schemeClr val="tx1"/>
-                </a:solidFill>
-              </a:rPr>
-              <a:t>タマラのエネルギーも、どう使うかが自由なことも変わりません</a:t>
-            </a:r>
-            <a:endParaRPr lang="en-US" sz="1300" dirty="0"/>
-          </a:p>
-        </p:txBody>
-      </p:sp>
-      <p:sp>
-        <p:nvSpPr>
-          <p:cNvPr id="9" name="keep1"/>
-          <p:cNvSpPr/>
-          <p:nvPr/>
-        </p:nvSpPr>
-        <p:spPr>
-          <a:xfrm>
-            <a:off x="457200" y="4983480"/>
-            <a:ext cx="6647688" cy="777240"/>
-          </a:xfrm>
-          <a:prstGeom prst="roundRect">
-            <a:avLst>
-              <a:gd name="adj" fmla="val 17647"/>
-            </a:avLst>
-          </a:prstGeom>
-          <a:solidFill>
-            <a:schemeClr val="bg2"/>
-          </a:solidFill>
-          <a:ln w="12700">
-            <a:solidFill>
-              <a:schemeClr val="bg2"/>
-            </a:solidFill>
-            <a:prstDash val="solid"/>
-          </a:ln>
-        </p:spPr>
-      </p:sp>
-      <p:sp>
-        <p:nvSpPr>
-          <p:cNvPr id="10" name="keep1-icon-bg"/>
-          <p:cNvSpPr/>
-          <p:nvPr/>
-        </p:nvSpPr>
-        <p:spPr>
-          <a:xfrm>
-            <a:off x="640080" y="5074920"/>
-            <a:ext cx="594360" cy="594360"/>
-          </a:xfrm>
-          <a:prstGeom prst="ellipse">
-            <a:avLst/>
-          </a:prstGeom>
-          <a:solidFill>
-            <a:schemeClr val="bg1"/>
-          </a:solidFill>
-          <a:ln w="12700">
-            <a:solidFill>
-              <a:schemeClr val="bg1"/>
-            </a:solidFill>
-            <a:prstDash val="solid"/>
-          </a:ln>
-        </p:spPr>
-      </p:sp>
-      <p:pic>
-        <p:nvPicPr>
-          <p:cNvPr id="11" name="keep1-icon" descr="preencoded.png">    </p:cNvPr>
-          <p:cNvPicPr>
-            <a:picLocks noChangeAspect="1"/>
-          </p:cNvPicPr>
-          <p:nvPr/>
-        </p:nvPicPr>
-        <p:blipFill>
-          <a:blip r:embed="rId3"/>
-          <a:stretch>
-            <a:fillRect/>
-          </a:stretch>
-        </p:blipFill>
-        <p:spPr>
-          <a:xfrm>
-            <a:off x="770839" y="5205679"/>
-            <a:ext cx="332842" cy="332842"/>
-          </a:xfrm>
-          <a:prstGeom prst="rect">
-            <a:avLst/>
-          </a:prstGeom>
-        </p:spPr>
-      </p:pic>
-      <p:sp>
-        <p:nvSpPr>
-          <p:cNvPr id="12" name="Text 7"/>
-          <p:cNvSpPr txBox="1"/>
-          <p:nvPr/>
-        </p:nvSpPr>
-        <p:spPr>
-          <a:xfrm>
-            <a:off x="1417320" y="4983480"/>
-            <a:ext cx="1737360" cy="777240"/>
-          </a:xfrm>
-          <a:prstGeom prst="rect">
-            <a:avLst/>
-          </a:prstGeom>
-          <a:noFill/>
-          <a:ln/>
-        </p:spPr>
-        <p:txBody>
-          <a:bodyPr wrap="square" lIns="0" tIns="0" rIns="0" bIns="0" rtlCol="0" anchor="ctr"/>
-          <a:lstStyle/>
-          <a:p>
-            <a:pPr indent="0" marL="0">
-              <a:buNone/>
-            </a:pPr>
-            <a:r>
-              <a:rPr lang="en-US" sz="1500" b="1" dirty="0">
-                <a:solidFill>
-                  <a:schemeClr val="tx2"/>
-                </a:solidFill>
-              </a:rPr>
-              <a:t>認定証</a:t>
-            </a:r>
-            <a:endParaRPr lang="en-US" sz="1500" dirty="0"/>
-          </a:p>
-        </p:txBody>
-      </p:sp>
-      <p:sp>
-        <p:nvSpPr>
-          <p:cNvPr id="13" name="Text 8"/>
-          <p:cNvSpPr txBox="1"/>
-          <p:nvPr/>
-        </p:nvSpPr>
-        <p:spPr>
-          <a:xfrm>
-            <a:off x="3200400" y="4983480"/>
-            <a:ext cx="3721608" cy="777240"/>
-          </a:xfrm>
-          <a:prstGeom prst="rect">
-            <a:avLst/>
-          </a:prstGeom>
-          <a:noFill/>
-          <a:ln/>
-        </p:spPr>
-        <p:txBody>
-          <a:bodyPr wrap="square" lIns="0" tIns="0" rIns="0" bIns="0" rtlCol="0" anchor="ctr"/>
-          <a:lstStyle/>
-          <a:p>
-            <a:pPr indent="0" marL="0">
-              <a:buNone/>
-            </a:pPr>
-            <a:r>
-              <a:rPr lang="en-US" sz="1300" dirty="0">
-                <a:solidFill>
-                  <a:schemeClr val="tx1"/>
-                </a:solidFill>
-              </a:rPr>
-              <a:t>今お持ちの認定証は、そのまま使えます</a:t>
-            </a:r>
-            <a:endParaRPr lang="en-US" sz="1300" dirty="0"/>
-          </a:p>
-        </p:txBody>
-      </p:sp>
-      <p:sp>
-        <p:nvSpPr>
-          <p:cNvPr id="14" name="keep2"/>
-          <p:cNvSpPr/>
-          <p:nvPr/>
-        </p:nvSpPr>
-        <p:spPr>
-          <a:xfrm>
-            <a:off x="457200" y="5897880"/>
-            <a:ext cx="6647688" cy="777240"/>
-          </a:xfrm>
-          <a:prstGeom prst="roundRect">
-            <a:avLst>
-              <a:gd name="adj" fmla="val 17647"/>
-            </a:avLst>
-          </a:prstGeom>
-          <a:solidFill>
-            <a:schemeClr val="bg2"/>
-          </a:solidFill>
-          <a:ln w="12700">
-            <a:solidFill>
-              <a:schemeClr val="bg2"/>
-            </a:solidFill>
-            <a:prstDash val="solid"/>
-          </a:ln>
-        </p:spPr>
-      </p:sp>
-      <p:sp>
-        <p:nvSpPr>
-          <p:cNvPr id="15" name="keep2-icon-bg"/>
-          <p:cNvSpPr/>
-          <p:nvPr/>
-        </p:nvSpPr>
-        <p:spPr>
-          <a:xfrm>
-            <a:off x="640080" y="5989320"/>
-            <a:ext cx="594360" cy="594360"/>
-          </a:xfrm>
-          <a:prstGeom prst="ellipse">
-            <a:avLst/>
-          </a:prstGeom>
-          <a:solidFill>
-            <a:schemeClr val="bg1"/>
-          </a:solidFill>
-          <a:ln w="12700">
-            <a:solidFill>
-              <a:schemeClr val="bg1"/>
-            </a:solidFill>
-            <a:prstDash val="solid"/>
-          </a:ln>
-        </p:spPr>
-      </p:sp>
-      <p:pic>
-        <p:nvPicPr>
-          <p:cNvPr id="16" name="keep2-icon" descr="preencoded.png">    </p:cNvPr>
+          <p:cNvPr id="6" name="keep0-icon" descr="preencoded.png"/>
           <p:cNvPicPr>
             <a:picLocks noChangeAspect="1"/>
           </p:cNvPicPr>
@@ -2628,7 +2202,7 @@
         </p:blipFill>
         <p:spPr>
           <a:xfrm>
-            <a:off x="770839" y="6120079"/>
+            <a:off x="770839" y="4291279"/>
             <a:ext cx="332842" cy="332842"/>
           </a:xfrm>
           <a:prstGeom prst="rect">
@@ -2638,13 +2212,13 @@
       </p:pic>
       <p:sp>
         <p:nvSpPr>
-          <p:cNvPr id="17" name="Text 11"/>
+          <p:cNvPr id="7" name="Text 3"/>
           <p:cNvSpPr txBox="1"/>
           <p:nvPr/>
         </p:nvSpPr>
         <p:spPr>
           <a:xfrm>
-            <a:off x="1417320" y="5897880"/>
+            <a:off x="1417320" y="4069080"/>
             <a:ext cx="1737360" cy="777240"/>
           </a:xfrm>
           <a:prstGeom prst="rect">
@@ -2657,7 +2231,7 @@
           <a:bodyPr wrap="square" lIns="0" tIns="0" rIns="0" bIns="0" rtlCol="0" anchor="ctr"/>
           <a:lstStyle/>
           <a:p>
-            <a:pPr indent="0" marL="0">
+            <a:pPr marL="0" indent="0">
               <a:buNone/>
             </a:pPr>
             <a:r>
@@ -2666,7 +2240,7 @@
                   <a:schemeClr val="tx2"/>
                 </a:solidFill>
               </a:rPr>
-              <a:t>復習会</a:t>
+              <a:t>タマラのエネルギー</a:t>
             </a:r>
             <a:endParaRPr lang="en-US" sz="1500" dirty="0"/>
           </a:p>
@@ -2674,13 +2248,13 @@
       </p:sp>
       <p:sp>
         <p:nvSpPr>
-          <p:cNvPr id="18" name="Text 12"/>
+          <p:cNvPr id="8" name="Text 4"/>
           <p:cNvSpPr txBox="1"/>
           <p:nvPr/>
         </p:nvSpPr>
         <p:spPr>
           <a:xfrm>
-            <a:off x="3200400" y="5897880"/>
+            <a:off x="3200400" y="4069080"/>
             <a:ext cx="3721608" cy="777240"/>
           </a:xfrm>
           <a:prstGeom prst="rect">
@@ -2693,7 +2267,7 @@
           <a:bodyPr wrap="square" lIns="0" tIns="0" rIns="0" bIns="0" rtlCol="0" anchor="ctr"/>
           <a:lstStyle/>
           <a:p>
-            <a:pPr indent="0" marL="0">
+            <a:pPr marL="0" indent="0">
               <a:buNone/>
             </a:pPr>
             <a:r>
@@ -2702,7 +2276,7 @@
                   <a:schemeClr val="tx1"/>
                 </a:solidFill>
               </a:rPr>
-              <a:t>私の復習会は、これからも続けます</a:t>
+              <a:t>タマラのエネルギーも、どう使うかが自由なことも変わりません</a:t>
             </a:r>
             <a:endParaRPr lang="en-US" sz="1300" dirty="0"/>
           </a:p>
@@ -2710,76 +2284,19 @@
       </p:sp>
       <p:sp>
         <p:nvSpPr>
-          <p:cNvPr id="19" name="Text 13"/>
-          <p:cNvSpPr txBox="1"/>
-          <p:nvPr/>
-        </p:nvSpPr>
-        <p:spPr>
-          <a:xfrm>
-            <a:off x="457200" y="6949440"/>
-            <a:ext cx="6647688" cy="457200"/>
-          </a:xfrm>
-          <a:prstGeom prst="rect">
-            <a:avLst/>
-          </a:prstGeom>
-          <a:noFill/>
-          <a:ln/>
-        </p:spPr>
-        <p:txBody>
-          <a:bodyPr wrap="square" lIns="0" tIns="0" rIns="0" bIns="0" rtlCol="0" anchor="t"/>
-          <a:lstStyle/>
-          <a:p>
-            <a:pPr indent="0" marL="0">
-              <a:buNone/>
-            </a:pPr>
-            <a:r>
-              <a:rPr lang="en-US" sz="2200" b="1" dirty="0">
-                <a:solidFill>
-                  <a:schemeClr val="tx2"/>
-                </a:solidFill>
-              </a:rPr>
-              <a:t>これからのこと</a:t>
-            </a:r>
-            <a:endParaRPr lang="en-US" sz="2200" dirty="0"/>
-          </a:p>
-        </p:txBody>
-      </p:sp>
-      <p:pic>
-        <p:nvPicPr>
-          <p:cNvPr id="20" name="img-letter" descr="img/D.jpg">    </p:cNvPr>
-          <p:cNvPicPr>
-            <a:picLocks noChangeAspect="1"/>
-          </p:cNvPicPr>
-          <p:nvPr/>
-        </p:nvPicPr>
-        <p:blipFill>
-          <a:blip r:embed="rId5"/>
-          <a:srcRect l="0" r="0" t="0" b="0"/>
-          <a:stretch/>
-        </p:blipFill>
-        <p:spPr>
-          <a:xfrm>
-            <a:off x="457200" y="7498080"/>
-            <a:ext cx="2468880" cy="1645920"/>
-          </a:xfrm>
-          <a:prstGeom prst="rect">
-            <a:avLst/>
-          </a:prstGeom>
-        </p:spPr>
-      </p:pic>
-      <p:sp>
-        <p:nvSpPr>
-          <p:cNvPr id="21" name="next0-icon-bg"/>
+          <p:cNvPr id="9" name="keep1"/>
           <p:cNvSpPr/>
           <p:nvPr/>
         </p:nvSpPr>
         <p:spPr>
           <a:xfrm>
-            <a:off x="3154680" y="7543800"/>
-            <a:ext cx="548640" cy="548640"/>
-          </a:xfrm>
-          <a:prstGeom prst="ellipse">
-            <a:avLst/>
+            <a:off x="457200" y="4983480"/>
+            <a:ext cx="6647688" cy="777240"/>
+          </a:xfrm>
+          <a:prstGeom prst="roundRect">
+            <a:avLst>
+              <a:gd name="adj" fmla="val 17647"/>
+            </a:avLst>
           </a:prstGeom>
           <a:solidFill>
             <a:schemeClr val="bg2"/>
@@ -2791,10 +2308,211 @@
             <a:prstDash val="solid"/>
           </a:ln>
         </p:spPr>
+        <p:txBody>
+          <a:bodyPr/>
+          <a:lstStyle/>
+          <a:p>
+            <a:endParaRPr lang="ja-JP" altLang="en-US"/>
+          </a:p>
+        </p:txBody>
+      </p:sp>
+      <p:sp>
+        <p:nvSpPr>
+          <p:cNvPr id="10" name="keep1-icon-bg"/>
+          <p:cNvSpPr/>
+          <p:nvPr/>
+        </p:nvSpPr>
+        <p:spPr>
+          <a:xfrm>
+            <a:off x="640080" y="5074920"/>
+            <a:ext cx="594360" cy="594360"/>
+          </a:xfrm>
+          <a:prstGeom prst="ellipse">
+            <a:avLst/>
+          </a:prstGeom>
+          <a:solidFill>
+            <a:schemeClr val="bg1"/>
+          </a:solidFill>
+          <a:ln w="12700">
+            <a:solidFill>
+              <a:schemeClr val="bg1"/>
+            </a:solidFill>
+            <a:prstDash val="solid"/>
+          </a:ln>
+        </p:spPr>
+        <p:txBody>
+          <a:bodyPr/>
+          <a:lstStyle/>
+          <a:p>
+            <a:endParaRPr lang="ja-JP" altLang="en-US"/>
+          </a:p>
+        </p:txBody>
       </p:sp>
       <p:pic>
         <p:nvPicPr>
-          <p:cNvPr id="22" name="next0-icon" descr="preencoded.png">    </p:cNvPr>
+          <p:cNvPr id="11" name="keep1-icon" descr="preencoded.png"/>
+          <p:cNvPicPr>
+            <a:picLocks noChangeAspect="1"/>
+          </p:cNvPicPr>
+          <p:nvPr/>
+        </p:nvPicPr>
+        <p:blipFill>
+          <a:blip r:embed="rId5"/>
+          <a:stretch>
+            <a:fillRect/>
+          </a:stretch>
+        </p:blipFill>
+        <p:spPr>
+          <a:xfrm>
+            <a:off x="770839" y="5205679"/>
+            <a:ext cx="332842" cy="332842"/>
+          </a:xfrm>
+          <a:prstGeom prst="rect">
+            <a:avLst/>
+          </a:prstGeom>
+        </p:spPr>
+      </p:pic>
+      <p:sp>
+        <p:nvSpPr>
+          <p:cNvPr id="12" name="Text 7"/>
+          <p:cNvSpPr txBox="1"/>
+          <p:nvPr/>
+        </p:nvSpPr>
+        <p:spPr>
+          <a:xfrm>
+            <a:off x="1417320" y="4983480"/>
+            <a:ext cx="1737360" cy="777240"/>
+          </a:xfrm>
+          <a:prstGeom prst="rect">
+            <a:avLst/>
+          </a:prstGeom>
+          <a:noFill/>
+          <a:ln/>
+        </p:spPr>
+        <p:txBody>
+          <a:bodyPr wrap="square" lIns="0" tIns="0" rIns="0" bIns="0" rtlCol="0" anchor="ctr"/>
+          <a:lstStyle/>
+          <a:p>
+            <a:pPr marL="0" indent="0">
+              <a:buNone/>
+            </a:pPr>
+            <a:r>
+              <a:rPr lang="en-US" sz="1500" b="1" dirty="0">
+                <a:solidFill>
+                  <a:schemeClr val="tx2"/>
+                </a:solidFill>
+              </a:rPr>
+              <a:t>認定証</a:t>
+            </a:r>
+            <a:endParaRPr lang="en-US" sz="1500" dirty="0"/>
+          </a:p>
+        </p:txBody>
+      </p:sp>
+      <p:sp>
+        <p:nvSpPr>
+          <p:cNvPr id="13" name="Text 8"/>
+          <p:cNvSpPr txBox="1"/>
+          <p:nvPr/>
+        </p:nvSpPr>
+        <p:spPr>
+          <a:xfrm>
+            <a:off x="3200400" y="4983480"/>
+            <a:ext cx="3721608" cy="777240"/>
+          </a:xfrm>
+          <a:prstGeom prst="rect">
+            <a:avLst/>
+          </a:prstGeom>
+          <a:noFill/>
+          <a:ln/>
+        </p:spPr>
+        <p:txBody>
+          <a:bodyPr wrap="square" lIns="0" tIns="0" rIns="0" bIns="0" rtlCol="0" anchor="ctr"/>
+          <a:lstStyle/>
+          <a:p>
+            <a:pPr marL="0" indent="0">
+              <a:buNone/>
+            </a:pPr>
+            <a:r>
+              <a:rPr lang="en-US" sz="1300" dirty="0">
+                <a:solidFill>
+                  <a:schemeClr val="tx1"/>
+                </a:solidFill>
+              </a:rPr>
+              <a:t>今お持ちの認定証は、そのまま使えます</a:t>
+            </a:r>
+            <a:endParaRPr lang="en-US" sz="1300" dirty="0"/>
+          </a:p>
+        </p:txBody>
+      </p:sp>
+      <p:sp>
+        <p:nvSpPr>
+          <p:cNvPr id="14" name="keep2"/>
+          <p:cNvSpPr/>
+          <p:nvPr/>
+        </p:nvSpPr>
+        <p:spPr>
+          <a:xfrm>
+            <a:off x="457200" y="5897880"/>
+            <a:ext cx="6647688" cy="777240"/>
+          </a:xfrm>
+          <a:prstGeom prst="roundRect">
+            <a:avLst>
+              <a:gd name="adj" fmla="val 17647"/>
+            </a:avLst>
+          </a:prstGeom>
+          <a:solidFill>
+            <a:schemeClr val="bg2"/>
+          </a:solidFill>
+          <a:ln w="12700">
+            <a:solidFill>
+              <a:schemeClr val="bg2"/>
+            </a:solidFill>
+            <a:prstDash val="solid"/>
+          </a:ln>
+        </p:spPr>
+        <p:txBody>
+          <a:bodyPr/>
+          <a:lstStyle/>
+          <a:p>
+            <a:endParaRPr lang="ja-JP" altLang="en-US"/>
+          </a:p>
+        </p:txBody>
+      </p:sp>
+      <p:sp>
+        <p:nvSpPr>
+          <p:cNvPr id="15" name="keep2-icon-bg"/>
+          <p:cNvSpPr/>
+          <p:nvPr/>
+        </p:nvSpPr>
+        <p:spPr>
+          <a:xfrm>
+            <a:off x="640080" y="5989320"/>
+            <a:ext cx="594360" cy="594360"/>
+          </a:xfrm>
+          <a:prstGeom prst="ellipse">
+            <a:avLst/>
+          </a:prstGeom>
+          <a:solidFill>
+            <a:schemeClr val="bg1"/>
+          </a:solidFill>
+          <a:ln w="12700">
+            <a:solidFill>
+              <a:schemeClr val="bg1"/>
+            </a:solidFill>
+            <a:prstDash val="solid"/>
+          </a:ln>
+        </p:spPr>
+        <p:txBody>
+          <a:bodyPr/>
+          <a:lstStyle/>
+          <a:p>
+            <a:endParaRPr lang="ja-JP" altLang="en-US"/>
+          </a:p>
+        </p:txBody>
+      </p:sp>
+      <p:pic>
+        <p:nvPicPr>
+          <p:cNvPr id="16" name="keep2-icon" descr="preencoded.png"/>
           <p:cNvPicPr>
             <a:picLocks noChangeAspect="1"/>
           </p:cNvPicPr>
@@ -2808,8 +2526,8 @@
         </p:blipFill>
         <p:spPr>
           <a:xfrm>
-            <a:off x="3275381" y="7664501"/>
-            <a:ext cx="307238" cy="307238"/>
+            <a:off x="770839" y="6120079"/>
+            <a:ext cx="332842" cy="332842"/>
           </a:xfrm>
           <a:prstGeom prst="rect">
             <a:avLst/>
@@ -2818,14 +2536,14 @@
       </p:pic>
       <p:sp>
         <p:nvSpPr>
-          <p:cNvPr id="23" name="Text 15"/>
+          <p:cNvPr id="17" name="Text 11"/>
           <p:cNvSpPr txBox="1"/>
           <p:nvPr/>
         </p:nvSpPr>
         <p:spPr>
           <a:xfrm>
-            <a:off x="3840480" y="7498080"/>
-            <a:ext cx="3264408" cy="777240"/>
+            <a:off x="1417320" y="5897880"/>
+            <a:ext cx="1737360" cy="777240"/>
           </a:xfrm>
           <a:prstGeom prst="rect">
             <a:avLst/>
@@ -2834,47 +2552,128 @@
           <a:ln/>
         </p:spPr>
         <p:txBody>
+          <a:bodyPr wrap="square" lIns="0" tIns="0" rIns="0" bIns="0" rtlCol="0" anchor="ctr"/>
+          <a:lstStyle/>
+          <a:p>
+            <a:pPr marL="0" indent="0">
+              <a:buNone/>
+            </a:pPr>
+            <a:r>
+              <a:rPr lang="en-US" sz="1500" b="1" dirty="0">
+                <a:solidFill>
+                  <a:schemeClr val="tx2"/>
+                </a:solidFill>
+              </a:rPr>
+              <a:t>復習会</a:t>
+            </a:r>
+            <a:endParaRPr lang="en-US" sz="1500" dirty="0"/>
+          </a:p>
+        </p:txBody>
+      </p:sp>
+      <p:sp>
+        <p:nvSpPr>
+          <p:cNvPr id="18" name="Text 12"/>
+          <p:cNvSpPr txBox="1"/>
+          <p:nvPr/>
+        </p:nvSpPr>
+        <p:spPr>
+          <a:xfrm>
+            <a:off x="3200400" y="5897880"/>
+            <a:ext cx="3721608" cy="777240"/>
+          </a:xfrm>
+          <a:prstGeom prst="rect">
+            <a:avLst/>
+          </a:prstGeom>
+          <a:noFill/>
+          <a:ln/>
+        </p:spPr>
+        <p:txBody>
+          <a:bodyPr wrap="square" lIns="0" tIns="0" rIns="0" bIns="0" rtlCol="0" anchor="ctr"/>
+          <a:lstStyle/>
+          <a:p>
+            <a:pPr marL="0" indent="0">
+              <a:buNone/>
+            </a:pPr>
+            <a:r>
+              <a:rPr lang="en-US" sz="1300" dirty="0">
+                <a:solidFill>
+                  <a:schemeClr val="tx1"/>
+                </a:solidFill>
+              </a:rPr>
+              <a:t>私の復習会は、これからも続けます</a:t>
+            </a:r>
+            <a:endParaRPr lang="en-US" sz="1300" dirty="0"/>
+          </a:p>
+        </p:txBody>
+      </p:sp>
+      <p:sp>
+        <p:nvSpPr>
+          <p:cNvPr id="19" name="Text 13"/>
+          <p:cNvSpPr txBox="1"/>
+          <p:nvPr/>
+        </p:nvSpPr>
+        <p:spPr>
+          <a:xfrm>
+            <a:off x="457200" y="6949440"/>
+            <a:ext cx="6647688" cy="457200"/>
+          </a:xfrm>
+          <a:prstGeom prst="rect">
+            <a:avLst/>
+          </a:prstGeom>
+          <a:noFill/>
+          <a:ln/>
+        </p:spPr>
+        <p:txBody>
           <a:bodyPr wrap="square" lIns="0" tIns="0" rIns="0" bIns="0" rtlCol="0" anchor="t"/>
           <a:lstStyle/>
           <a:p>
-            <a:pPr indent="0" marL="0">
-              <a:buNone/>
-            </a:pPr>
-            <a:r>
-              <a:rPr lang="en-US" sz="1400" b="1" dirty="0">
+            <a:pPr marL="0" indent="0">
+              <a:buNone/>
+            </a:pPr>
+            <a:r>
+              <a:rPr lang="en-US" sz="2200" b="1" dirty="0">
                 <a:solidFill>
                   <a:schemeClr val="tx2"/>
                 </a:solidFill>
               </a:rPr>
-              <a:t>12月末</a:t>
-            </a:r>
-            <a:endParaRPr lang="en-US" sz="1400" dirty="0"/>
-          </a:p>
-          <a:p>
-            <a:pPr indent="0" marL="0">
-              <a:buNone/>
-            </a:pPr>
-            <a:r>
-              <a:rPr lang="en-US" sz="1200" dirty="0">
-                <a:solidFill>
-                  <a:schemeClr val="tx1"/>
-                </a:solidFill>
-              </a:rPr>
-              <a:t>主催の講座・イベントが終わります</a:t>
-            </a:r>
-            <a:endParaRPr lang="en-US" sz="1400" dirty="0"/>
-          </a:p>
-        </p:txBody>
-      </p:sp>
-      <p:sp>
-        <p:nvSpPr>
-          <p:cNvPr id="24" name="next1-icon-bg"/>
+              <a:t>これからのこと</a:t>
+            </a:r>
+            <a:endParaRPr lang="en-US" sz="2200" dirty="0"/>
+          </a:p>
+        </p:txBody>
+      </p:sp>
+      <p:pic>
+        <p:nvPicPr>
+          <p:cNvPr id="20" name="img-letter" descr="img/D.jpg"/>
+          <p:cNvPicPr>
+            <a:picLocks noChangeAspect="1"/>
+          </p:cNvPicPr>
+          <p:nvPr/>
+        </p:nvPicPr>
+        <p:blipFill>
+          <a:blip r:embed="rId7"/>
+          <a:srcRect/>
+          <a:stretch/>
+        </p:blipFill>
+        <p:spPr>
+          <a:xfrm>
+            <a:off x="457200" y="7498080"/>
+            <a:ext cx="2468880" cy="1645920"/>
+          </a:xfrm>
+          <a:prstGeom prst="rect">
+            <a:avLst/>
+          </a:prstGeom>
+        </p:spPr>
+      </p:pic>
+      <p:sp>
+        <p:nvSpPr>
+          <p:cNvPr id="21" name="next0-icon-bg"/>
           <p:cNvSpPr/>
           <p:nvPr/>
         </p:nvSpPr>
         <p:spPr>
           <a:xfrm>
-            <a:off x="3154680" y="8412480"/>
+            <a:off x="3154680" y="7543800"/>
             <a:ext cx="548640" cy="548640"/>
           </a:xfrm>
           <a:prstGeom prst="ellipse">
@@ -2890,23 +2689,136 @@
             <a:prstDash val="solid"/>
           </a:ln>
         </p:spPr>
+        <p:txBody>
+          <a:bodyPr/>
+          <a:lstStyle/>
+          <a:p>
+            <a:endParaRPr lang="ja-JP" altLang="en-US"/>
+          </a:p>
+        </p:txBody>
       </p:sp>
       <p:pic>
         <p:nvPicPr>
-          <p:cNvPr id="25" name="next1-icon" descr="preencoded.png">    </p:cNvPr>
+          <p:cNvPr id="22" name="next0-icon" descr="preencoded.png"/>
           <p:cNvPicPr>
             <a:picLocks noChangeAspect="1"/>
           </p:cNvPicPr>
           <p:nvPr/>
         </p:nvPicPr>
         <p:blipFill>
-          <a:blip r:embed="rId7"/>
+          <a:blip r:embed="rId8"/>
           <a:stretch>
             <a:fillRect/>
           </a:stretch>
         </p:blipFill>
         <p:spPr>
           <a:xfrm>
+            <a:off x="3275381" y="7664501"/>
+            <a:ext cx="307238" cy="307238"/>
+          </a:xfrm>
+          <a:prstGeom prst="rect">
+            <a:avLst/>
+          </a:prstGeom>
+        </p:spPr>
+      </p:pic>
+      <p:sp>
+        <p:nvSpPr>
+          <p:cNvPr id="23" name="Text 15"/>
+          <p:cNvSpPr txBox="1"/>
+          <p:nvPr/>
+        </p:nvSpPr>
+        <p:spPr>
+          <a:xfrm>
+            <a:off x="3840480" y="7498080"/>
+            <a:ext cx="3264408" cy="777240"/>
+          </a:xfrm>
+          <a:prstGeom prst="rect">
+            <a:avLst/>
+          </a:prstGeom>
+          <a:noFill/>
+          <a:ln/>
+        </p:spPr>
+        <p:txBody>
+          <a:bodyPr wrap="square" lIns="0" tIns="0" rIns="0" bIns="0" rtlCol="0" anchor="t"/>
+          <a:lstStyle/>
+          <a:p>
+            <a:pPr marL="0" indent="0">
+              <a:buNone/>
+            </a:pPr>
+            <a:r>
+              <a:rPr lang="en-US" sz="1400" b="1" dirty="0">
+                <a:solidFill>
+                  <a:schemeClr val="tx2"/>
+                </a:solidFill>
+              </a:rPr>
+              <a:t>12月末</a:t>
+            </a:r>
+            <a:endParaRPr lang="en-US" sz="1400" dirty="0"/>
+          </a:p>
+          <a:p>
+            <a:pPr marL="0" indent="0">
+              <a:buNone/>
+            </a:pPr>
+            <a:r>
+              <a:rPr lang="en-US" sz="1200" dirty="0">
+                <a:solidFill>
+                  <a:schemeClr val="tx1"/>
+                </a:solidFill>
+              </a:rPr>
+              <a:t>主催の講座・イベントが終わります</a:t>
+            </a:r>
+            <a:endParaRPr lang="en-US" sz="1400" dirty="0"/>
+          </a:p>
+        </p:txBody>
+      </p:sp>
+      <p:sp>
+        <p:nvSpPr>
+          <p:cNvPr id="24" name="next1-icon-bg"/>
+          <p:cNvSpPr/>
+          <p:nvPr/>
+        </p:nvSpPr>
+        <p:spPr>
+          <a:xfrm>
+            <a:off x="3154680" y="8412480"/>
+            <a:ext cx="548640" cy="548640"/>
+          </a:xfrm>
+          <a:prstGeom prst="ellipse">
+            <a:avLst/>
+          </a:prstGeom>
+          <a:solidFill>
+            <a:schemeClr val="bg2"/>
+          </a:solidFill>
+          <a:ln w="12700">
+            <a:solidFill>
+              <a:schemeClr val="bg2"/>
+            </a:solidFill>
+            <a:prstDash val="solid"/>
+          </a:ln>
+        </p:spPr>
+        <p:txBody>
+          <a:bodyPr/>
+          <a:lstStyle/>
+          <a:p>
+            <a:endParaRPr lang="ja-JP" altLang="en-US"/>
+          </a:p>
+        </p:txBody>
+      </p:sp>
+      <p:pic>
+        <p:nvPicPr>
+          <p:cNvPr id="25" name="next1-icon" descr="preencoded.png"/>
+          <p:cNvPicPr>
+            <a:picLocks noChangeAspect="1"/>
+          </p:cNvPicPr>
+          <p:nvPr/>
+        </p:nvPicPr>
+        <p:blipFill>
+          <a:blip r:embed="rId9"/>
+          <a:stretch>
+            <a:fillRect/>
+          </a:stretch>
+        </p:blipFill>
+        <p:spPr>
+          <a:xfrm>
             <a:off x="3275381" y="8533181"/>
             <a:ext cx="307238" cy="307238"/>
           </a:xfrm>
@@ -2936,7 +2848,7 @@
           <a:bodyPr wrap="square" lIns="0" tIns="0" rIns="0" bIns="0" rtlCol="0" anchor="t"/>
           <a:lstStyle/>
           <a:p>
-            <a:pPr indent="0" marL="0">
+            <a:pPr marL="0" indent="0">
               <a:buNone/>
             </a:pPr>
             <a:r>
@@ -2950,7 +2862,7 @@
             <a:endParaRPr lang="en-US" sz="1400" dirty="0"/>
           </a:p>
           <a:p>
-            <a:pPr indent="0" marL="0">
+            <a:pPr marL="0" indent="0">
               <a:buNone/>
             </a:pPr>
             <a:r>
@@ -2991,6 +2903,13 @@
             <a:prstDash val="solid"/>
           </a:ln>
         </p:spPr>
+        <p:txBody>
+          <a:bodyPr/>
+          <a:lstStyle/>
+          <a:p>
+            <a:endParaRPr lang="ja-JP" altLang="en-US"/>
+          </a:p>
+        </p:txBody>
       </p:sp>
       <p:sp>
         <p:nvSpPr>
@@ -3013,7 +2932,7 @@
           <a:bodyPr wrap="square" lIns="0" tIns="0" rIns="0" bIns="0" rtlCol="0" anchor="ctr"/>
           <a:lstStyle/>
           <a:p>
-            <a:pPr algn="ctr" indent="0" marL="0">
+            <a:pPr marL="0" indent="0" algn="ctr">
               <a:buNone/>
             </a:pPr>
             <a:r>
@@ -3027,7 +2946,7 @@
             <a:endParaRPr lang="en-US" sz="1400" dirty="0"/>
           </a:p>
           <a:p>
-            <a:pPr algn="ctr" indent="0" marL="0">
+            <a:pPr marL="0" indent="0" algn="ctr">
               <a:buNone/>
             </a:pPr>
             <a:r>
@@ -3343,4 +3262,319 @@
     </a:ext>
   </a:extLst>
 </a:theme>
+</file>
+
+<file path=ppt/theme/theme2.xml><?xml version="1.0" encoding="utf-8"?>
+<a:theme xmlns:a="http://schemas.openxmlformats.org/drawingml/2006/main" name="Office テーマ">
+  <a:themeElements>
+    <a:clrScheme name="Office">
+      <a:dk1>
+        <a:sysClr val="windowText" lastClr="000000"/>
+      </a:dk1>
+      <a:lt1>
+        <a:sysClr val="window" lastClr="FFFFFF"/>
+      </a:lt1>
+      <a:dk2>
+        <a:srgbClr val="0E2841"/>
+      </a:dk2>
+      <a:lt2>
+        <a:srgbClr val="E8E8E8"/>
+      </a:lt2>
+      <a:accent1>
+        <a:srgbClr val="156082"/>
+      </a:accent1>
+      <a:accent2>
+        <a:srgbClr val="E97132"/>
+      </a:accent2>
+      <a:accent3>
+        <a:srgbClr val="196B24"/>
+      </a:accent3>
+      <a:accent4>
+        <a:srgbClr val="0F9ED5"/>
+      </a:accent4>
+      <a:accent5>
+        <a:srgbClr val="A02B93"/>
+      </a:accent5>
+      <a:accent6>
+        <a:srgbClr val="4EA72E"/>
+      </a:accent6>
+      <a:hlink>
+        <a:srgbClr val="467886"/>
+      </a:hlink>
+      <a:folHlink>
+        <a:srgbClr val="96607D"/>
+      </a:folHlink>
+    </a:clrScheme>
+    <a:fontScheme name="Office">
+      <a:majorFont>
+        <a:latin typeface="游ゴシック Light" panose="02110004020202020204"/>
+        <a:ea typeface=""/>
+        <a:cs typeface=""/>
+        <a:font script="Jpan" typeface="游ゴシック Light"/>
+        <a:font script="Hang" typeface="맑은 고딕"/>
+        <a:font script="Hans" typeface="等线 Light"/>
+        <a:font script="Hant" typeface="新細明體"/>
+        <a:font script="Arab" typeface="Times New Roman"/>
+        <a:font script="Hebr" typeface="Times New Roman"/>
+        <a:font script="Thai" typeface="Angsana New"/>
+        <a:font script="Ethi" typeface="Nyala"/>
+        <a:font script="Beng" typeface="Vrinda"/>
+        <a:font script="Gujr" typeface="Shruti"/>
+        <a:font script="Khmr" typeface="MoolBoran"/>
+        <a:font script="Knda" typeface="Tunga"/>
+        <a:font script="Guru" typeface="Raavi"/>
+        <a:font script="Cans" typeface="Euphemia"/>
+        <a:font script="Cher" typeface="Plantagenet Cherokee"/>
+        <a:font script="Yiii" typeface="Microsoft Yi Baiti"/>
+        <a:font script="Tibt" typeface="Microsoft Himalaya"/>
+        <a:font script="Thaa" typeface="MV Boli"/>
+        <a:font script="Deva" typeface="Mangal"/>
+        <a:font script="Telu" typeface="Gautami"/>
+        <a:font script="Taml" typeface="Latha"/>
+        <a:font script="Syrc" typeface="Estrangelo Edessa"/>
+        <a:font script="Orya" typeface="Kalinga"/>
+        <a:font script="Mlym" typeface="Kartika"/>
+        <a:font script="Laoo" typeface="DokChampa"/>
+        <a:font script="Sinh" typeface="Iskoola Pota"/>
+        <a:font script="Mong" typeface="Mongolian Baiti"/>
+        <a:font script="Viet" typeface="Times New Roman"/>
+        <a:font script="Uigh" typeface="Microsoft Uighur"/>
+        <a:font script="Geor" typeface="Sylfaen"/>
+        <a:font script="Armn" typeface="Arial"/>
+        <a:font script="Bugi" typeface="Leelawadee UI"/>
+        <a:font script="Bopo" typeface="Microsoft JhengHei"/>
+        <a:font script="Java" typeface="Javanese Text"/>
+        <a:font script="Lisu" typeface="Segoe UI"/>
+        <a:font script="Mymr" typeface="Myanmar Text"/>
+        <a:font script="Nkoo" typeface="Ebrima"/>
+        <a:font script="Olck" typeface="Nirmala UI"/>
+        <a:font script="Osma" typeface="Ebrima"/>
+        <a:font script="Phag" typeface="Phagspa"/>
+        <a:font script="Syrn" typeface="Estrangelo Edessa"/>
+        <a:font script="Syrj" typeface="Estrangelo Edessa"/>
+        <a:font script="Syre" typeface="Estrangelo Edessa"/>
+        <a:font script="Sora" typeface="Nirmala UI"/>
+        <a:font script="Tale" typeface="Microsoft Tai Le"/>
+        <a:font script="Talu" typeface="Microsoft New Tai Lue"/>
+        <a:font script="Tfng" typeface="Ebrima"/>
+      </a:majorFont>
+      <a:minorFont>
+        <a:latin typeface="游ゴシック" panose="02110004020202020204"/>
+        <a:ea typeface=""/>
+        <a:cs typeface=""/>
+        <a:font script="Jpan" typeface="游ゴシック"/>
+        <a:font script="Hang" typeface="맑은 고딕"/>
+        <a:font script="Hans" typeface="等线"/>
+        <a:font script="Hant" typeface="新細明體"/>
+        <a:font script="Arab" typeface="Arial"/>
+        <a:font script="Hebr" typeface="Arial"/>
+        <a:font script="Thai" typeface="Cordia New"/>
+        <a:font script="Ethi" typeface="Nyala"/>
+        <a:font script="Beng" typeface="Vrinda"/>
+        <a:font script="Gujr" typeface="Shruti"/>
+        <a:font script="Khmr" typeface="DaunPenh"/>
+        <a:font script="Knda" typeface="Tunga"/>
+        <a:font script="Guru" typeface="Raavi"/>
+        <a:font script="Cans" typeface="Euphemia"/>
+        <a:font script="Cher" typeface="Plantagenet Cherokee"/>
+        <a:font script="Yiii" typeface="Microsoft Yi Baiti"/>
+        <a:font script="Tibt" typeface="Microsoft Himalaya"/>
+        <a:font script="Thaa" typeface="MV Boli"/>
+        <a:font script="Deva" typeface="Mangal"/>
+        <a:font script="Telu" typeface="Gautami"/>
+        <a:font script="Taml" typeface="Latha"/>
+        <a:font script="Syrc" typeface="Estrangelo Edessa"/>
+        <a:font script="Orya" typeface="Kalinga"/>
+        <a:font script="Mlym" typeface="Kartika"/>
+        <a:font script="Laoo" typeface="DokChampa"/>
+        <a:font script="Sinh" typeface="Iskoola Pota"/>
+        <a:font script="Mong" typeface="Mongolian Baiti"/>
+        <a:font script="Viet" typeface="Arial"/>
+        <a:font script="Uigh" typeface="Microsoft Uighur"/>
+        <a:font script="Geor" typeface="Sylfaen"/>
+        <a:font script="Armn" typeface="Arial"/>
+        <a:font script="Bugi" typeface="Leelawadee UI"/>
+        <a:font script="Bopo" typeface="Microsoft JhengHei"/>
+        <a:font script="Java" typeface="Javanese Text"/>
+        <a:font script="Lisu" typeface="Segoe UI"/>
+        <a:font script="Mymr" typeface="Myanmar Text"/>
+        <a:font script="Nkoo" typeface="Ebrima"/>
+        <a:font script="Olck" typeface="Nirmala UI"/>
+        <a:font script="Osma" typeface="Ebrima"/>
+        <a:font script="Phag" typeface="Phagspa"/>
+        <a:font script="Syrn" typeface="Estrangelo Edessa"/>
+        <a:font script="Syrj" typeface="Estrangelo Edessa"/>
+        <a:font script="Syre" typeface="Estrangelo Edessa"/>
+        <a:font script="Sora" typeface="Nirmala UI"/>
+        <a:font script="Tale" typeface="Microsoft Tai Le"/>
+        <a:font script="Talu" typeface="Microsoft New Tai Lue"/>
+        <a:font script="Tfng" typeface="Ebrima"/>
+      </a:minorFont>
+    </a:fontScheme>
+    <a:fmtScheme name="Office">
+      <a:fillStyleLst>
+        <a:solidFill>
+          <a:schemeClr val="phClr"/>
+        </a:solidFill>
+        <a:gradFill rotWithShape="1">
+          <a:gsLst>
+            <a:gs pos="0">
+              <a:schemeClr val="phClr">
+                <a:lumMod val="110000"/>
+                <a:satMod val="105000"/>
+                <a:tint val="67000"/>
+              </a:schemeClr>
+            </a:gs>
+            <a:gs pos="50000">
+              <a:schemeClr val="phClr">
+                <a:lumMod val="105000"/>
+                <a:satMod val="103000"/>
+                <a:tint val="73000"/>
+              </a:schemeClr>
+            </a:gs>
+            <a:gs pos="100000">
+              <a:schemeClr val="phClr">
+                <a:lumMod val="105000"/>
+                <a:satMod val="109000"/>
+                <a:tint val="81000"/>
+              </a:schemeClr>
+            </a:gs>
+          </a:gsLst>
+          <a:lin ang="5400000" scaled="0"/>
+        </a:gradFill>
+        <a:gradFill rotWithShape="1">
+          <a:gsLst>
+            <a:gs pos="0">
+              <a:schemeClr val="phClr">
+                <a:satMod val="103000"/>
+                <a:lumMod val="102000"/>
+                <a:tint val="94000"/>
+              </a:schemeClr>
+            </a:gs>
+            <a:gs pos="50000">
+              <a:schemeClr val="phClr">
+                <a:satMod val="110000"/>
+                <a:lumMod val="100000"/>
+                <a:shade val="100000"/>
+              </a:schemeClr>
+            </a:gs>
+            <a:gs pos="100000">
+              <a:schemeClr val="phClr">
+                <a:lumMod val="99000"/>
+                <a:satMod val="120000"/>
+                <a:shade val="78000"/>
+              </a:schemeClr>
+            </a:gs>
+          </a:gsLst>
+          <a:lin ang="5400000" scaled="0"/>
+        </a:gradFill>
+      </a:fillStyleLst>
+      <a:lnStyleLst>
+        <a:ln w="12700" cap="flat" cmpd="sng" algn="ctr">
+          <a:solidFill>
+            <a:schemeClr val="phClr"/>
+          </a:solidFill>
+          <a:prstDash val="solid"/>
+          <a:miter lim="800000"/>
+        </a:ln>
+        <a:ln w="19050" cap="flat" cmpd="sng" algn="ctr">
+          <a:solidFill>
+            <a:schemeClr val="phClr"/>
+          </a:solidFill>
+          <a:prstDash val="solid"/>
+          <a:miter lim="800000"/>
+        </a:ln>
+        <a:ln w="25400" cap="flat" cmpd="sng" algn="ctr">
+          <a:solidFill>
+            <a:schemeClr val="phClr"/>
+          </a:solidFill>
+          <a:prstDash val="solid"/>
+          <a:miter lim="800000"/>
+        </a:ln>
+      </a:lnStyleLst>
+      <a:effectStyleLst>
+        <a:effectStyle>
+          <a:effectLst/>
+        </a:effectStyle>
+        <a:effectStyle>
+          <a:effectLst/>
+        </a:effectStyle>
+        <a:effectStyle>
+          <a:effectLst>
+            <a:outerShdw blurRad="57150" dist="19050" dir="5400000" algn="ctr" rotWithShape="0">
+              <a:srgbClr val="000000">
+                <a:alpha val="63000"/>
+              </a:srgbClr>
+            </a:outerShdw>
+          </a:effectLst>
+        </a:effectStyle>
+      </a:effectStyleLst>
+      <a:bgFillStyleLst>
+        <a:solidFill>
+          <a:schemeClr val="phClr"/>
+        </a:solidFill>
+        <a:solidFill>
+          <a:schemeClr val="phClr">
+            <a:tint val="95000"/>
+            <a:satMod val="170000"/>
+          </a:schemeClr>
+        </a:solidFill>
+        <a:gradFill rotWithShape="1">
+          <a:gsLst>
+            <a:gs pos="0">
+              <a:schemeClr val="phClr">
+                <a:tint val="93000"/>
+                <a:satMod val="150000"/>
+                <a:shade val="98000"/>
+                <a:lumMod val="102000"/>
+              </a:schemeClr>
+            </a:gs>
+            <a:gs pos="50000">
+              <a:schemeClr val="phClr">
+                <a:tint val="98000"/>
+                <a:satMod val="130000"/>
+                <a:shade val="90000"/>
+                <a:lumMod val="103000"/>
+              </a:schemeClr>
+            </a:gs>
+            <a:gs pos="100000">
+              <a:schemeClr val="phClr">
+                <a:shade val="63000"/>
+                <a:satMod val="120000"/>
+              </a:schemeClr>
+            </a:gs>
+          </a:gsLst>
+          <a:lin ang="5400000" scaled="0"/>
+        </a:gradFill>
+      </a:bgFillStyleLst>
+    </a:fmtScheme>
+  </a:themeElements>
+  <a:objectDefaults>
+    <a:lnDef>
+      <a:spPr/>
+      <a:bodyPr/>
+      <a:lstStyle/>
+      <a:style>
+        <a:lnRef idx="2">
+          <a:schemeClr val="accent1"/>
+        </a:lnRef>
+        <a:fillRef idx="0">
+          <a:schemeClr val="accent1"/>
+        </a:fillRef>
+        <a:effectRef idx="1">
+          <a:schemeClr val="accent1"/>
+        </a:effectRef>
+        <a:fontRef idx="minor">
+          <a:schemeClr val="tx1"/>
+        </a:fontRef>
+      </a:style>
+    </a:lnDef>
+  </a:objectDefaults>
+  <a:extraClrSchemeLst/>
+  <a:extLst>
+    <a:ext uri="{05A4C25C-085E-4340-85A3-A5531E510DB2}">
+      <thm15:themeFamily xmlns:thm15="http://schemas.microsoft.com/office/thememl/2012/main" name="Office Theme" id="{2E142A2C-CD16-42D6-873A-C26D2A0506FA}" vid="{1BDDFF52-6CD6-40A5-AB3C-68EB2F1E4D0A}"/>
+    </a:ext>
+  </a:extLst>
+</a:theme>
 </file>